--- a/Waldiez_finalPresentation.pptx
+++ b/Waldiez_finalPresentation.pptx
@@ -5,18 +5,19 @@
     <p:sldMasterId id="2147483660" r:id="rId1"/>
   </p:sldMasterIdLst>
   <p:notesMasterIdLst>
-    <p:notesMasterId r:id="rId8"/>
+    <p:notesMasterId r:id="rId9"/>
   </p:notesMasterIdLst>
   <p:handoutMasterIdLst>
-    <p:handoutMasterId r:id="rId9"/>
+    <p:handoutMasterId r:id="rId10"/>
   </p:handoutMasterIdLst>
   <p:sldIdLst>
     <p:sldId id="277" r:id="rId2"/>
     <p:sldId id="267" r:id="rId3"/>
-    <p:sldId id="278" r:id="rId4"/>
-    <p:sldId id="282" r:id="rId5"/>
-    <p:sldId id="281" r:id="rId6"/>
-    <p:sldId id="276" r:id="rId7"/>
+    <p:sldId id="283" r:id="rId4"/>
+    <p:sldId id="278" r:id="rId5"/>
+    <p:sldId id="282" r:id="rId6"/>
+    <p:sldId id="281" r:id="rId7"/>
+    <p:sldId id="276" r:id="rId8"/>
   </p:sldIdLst>
   <p:sldSz cx="12192000" cy="6858000"/>
   <p:notesSz cx="6858000" cy="9144000"/>
@@ -122,6 +123,7 @@
           <p14:sldIdLst>
             <p14:sldId id="277"/>
             <p14:sldId id="267"/>
+            <p14:sldId id="283"/>
             <p14:sldId id="278"/>
             <p14:sldId id="282"/>
             <p14:sldId id="281"/>
@@ -249,7 +251,7 @@
           <a:p>
             <a:fld id="{5AF42606-CFC7-4350-BF7D-F79705CBB3DF}" type="datetimeFigureOut">
               <a:rPr lang="el-GR" smtClean="0"/>
-              <a:t>25/2/2026</a:t>
+              <a:t>25/2/26</a:t>
             </a:fld>
             <a:endParaRPr lang="el-GR"/>
           </a:p>
@@ -435,7 +437,7 @@
           <a:p>
             <a:fld id="{F07D7115-7C26-4374-AB2C-A3EA9DC26E87}" type="datetimeFigureOut">
               <a:rPr lang="el-GR" smtClean="0"/>
-              <a:t>25/2/2026</a:t>
+              <a:t>25/2/26</a:t>
             </a:fld>
             <a:endParaRPr lang="el-GR"/>
           </a:p>
@@ -883,7 +885,7 @@
     </p:spTree>
     <p:extLst>
       <p:ext uri="{BB962C8B-B14F-4D97-AF65-F5344CB8AC3E}">
-        <p14:creationId xmlns:p14="http://schemas.microsoft.com/office/powerpoint/2010/main" val="3389543499"/>
+        <p14:creationId xmlns:p14="http://schemas.microsoft.com/office/powerpoint/2010/main" val="938700412"/>
       </p:ext>
     </p:extLst>
   </p:cSld>
@@ -945,7 +947,7 @@
     </p:spTree>
     <p:extLst>
       <p:ext uri="{BB962C8B-B14F-4D97-AF65-F5344CB8AC3E}">
-        <p14:creationId xmlns:p14="http://schemas.microsoft.com/office/powerpoint/2010/main" val="2939053067"/>
+        <p14:creationId xmlns:p14="http://schemas.microsoft.com/office/powerpoint/2010/main" val="3389543499"/>
       </p:ext>
     </p:extLst>
   </p:cSld>
@@ -1007,6 +1009,68 @@
     </p:spTree>
     <p:extLst>
       <p:ext uri="{BB962C8B-B14F-4D97-AF65-F5344CB8AC3E}">
+        <p14:creationId xmlns:p14="http://schemas.microsoft.com/office/powerpoint/2010/main" val="2939053067"/>
+      </p:ext>
+    </p:extLst>
+  </p:cSld>
+  <p:clrMapOvr>
+    <a:masterClrMapping/>
+  </p:clrMapOvr>
+</p:notes>
+</file>
+
+<file path=ppt/notesSlides/notesSlide6.xml><?xml version="1.0" encoding="utf-8"?>
+<p:notes xmlns:a="http://schemas.openxmlformats.org/drawingml/2006/main" xmlns:r="http://schemas.openxmlformats.org/officeDocument/2006/relationships" xmlns:p="http://schemas.openxmlformats.org/presentationml/2006/main">
+  <p:cSld>
+    <p:spTree>
+      <p:nvGrpSpPr>
+        <p:cNvPr id="1" name=""/>
+        <p:cNvGrpSpPr/>
+        <p:nvPr/>
+      </p:nvGrpSpPr>
+      <p:grpSpPr>
+        <a:xfrm>
+          <a:off x="0" y="0"/>
+          <a:ext cx="0" cy="0"/>
+          <a:chOff x="0" y="0"/>
+          <a:chExt cx="0" cy="0"/>
+        </a:xfrm>
+      </p:grpSpPr>
+      <p:sp>
+        <p:nvSpPr>
+          <p:cNvPr id="2" name="Slide Image Placeholder 1"/>
+          <p:cNvSpPr>
+            <a:spLocks noGrp="1" noRot="1" noChangeAspect="1"/>
+          </p:cNvSpPr>
+          <p:nvPr>
+            <p:ph type="sldImg"/>
+          </p:nvPr>
+        </p:nvSpPr>
+        <p:spPr/>
+      </p:sp>
+      <p:sp>
+        <p:nvSpPr>
+          <p:cNvPr id="3" name="Notes Placeholder 2"/>
+          <p:cNvSpPr>
+            <a:spLocks noGrp="1"/>
+          </p:cNvSpPr>
+          <p:nvPr>
+            <p:ph type="body" idx="1"/>
+          </p:nvPr>
+        </p:nvSpPr>
+        <p:spPr/>
+        <p:txBody>
+          <a:bodyPr/>
+          <a:lstStyle/>
+          <a:p>
+            <a:pPr lvl="0"/>
+            <a:endParaRPr lang="el-GR" sz="800" dirty="0"/>
+          </a:p>
+        </p:txBody>
+      </p:sp>
+    </p:spTree>
+    <p:extLst>
+      <p:ext uri="{BB962C8B-B14F-4D97-AF65-F5344CB8AC3E}">
         <p14:creationId xmlns:p14="http://schemas.microsoft.com/office/powerpoint/2010/main" val="2598482335"/>
       </p:ext>
     </p:extLst>
@@ -1017,7 +1081,7 @@
 </p:notes>
 </file>
 
-<file path=ppt/notesSlides/notesSlide6.xml><?xml version="1.0" encoding="utf-8"?>
+<file path=ppt/notesSlides/notesSlide7.xml><?xml version="1.0" encoding="utf-8"?>
 <p:notes xmlns:a="http://schemas.openxmlformats.org/drawingml/2006/main" xmlns:r="http://schemas.openxmlformats.org/officeDocument/2006/relationships" xmlns:p="http://schemas.openxmlformats.org/presentationml/2006/main">
   <p:cSld>
     <p:spTree>
@@ -5537,7 +5601,7 @@
         <p:spPr>
           <a:xfrm>
             <a:off x="521208" y="782990"/>
-            <a:ext cx="4893519" cy="307777"/>
+            <a:ext cx="3566297" cy="338554"/>
           </a:xfrm>
           <a:prstGeom prst="rect">
             <a:avLst/>
@@ -5551,7 +5615,7 @@
           <a:lstStyle/>
           <a:p>
             <a:r>
-              <a:rPr lang="en-GB" sz="1400" b="1" dirty="0" err="1">
+              <a:rPr lang="en-GB" sz="1600" b="1" dirty="0" err="1">
                 <a:effectLst/>
                 <a:latin typeface="Calibri" panose="020F0502020204030204" pitchFamily="34" charset="0"/>
                 <a:ea typeface="Calibri" panose="020F0502020204030204" pitchFamily="34" charset="0"/>
@@ -5560,17 +5624,53 @@
               <a:t>Waldiez</a:t>
             </a:r>
             <a:r>
-              <a:rPr lang="en-GB" sz="1400" b="1" dirty="0">
+              <a:rPr lang="en-GB" sz="1600" b="1" dirty="0">
                 <a:effectLst/>
                 <a:latin typeface="Calibri" panose="020F0502020204030204" pitchFamily="34" charset="0"/>
                 <a:ea typeface="Calibri" panose="020F0502020204030204" pitchFamily="34" charset="0"/>
                 <a:cs typeface="Calibri" panose="020F0502020204030204" pitchFamily="34" charset="0"/>
               </a:rPr>
-              <a:t> flow image with description – Agent’s specific missions</a:t>
+              <a:t> flow – Agent’s specific missions</a:t>
             </a:r>
           </a:p>
         </p:txBody>
       </p:sp>
+      <p:pic>
+        <p:nvPicPr>
+          <p:cNvPr id="6" name="Picture 5">
+            <a:extLst>
+              <a:ext uri="{FF2B5EF4-FFF2-40B4-BE49-F238E27FC236}">
+                <a16:creationId xmlns:a16="http://schemas.microsoft.com/office/drawing/2014/main" id="{D3F341F7-5DC1-614D-4EC6-92929DB6045E}"/>
+              </a:ext>
+            </a:extLst>
+          </p:cNvPr>
+          <p:cNvPicPr>
+            <a:picLocks noChangeAspect="1"/>
+          </p:cNvPicPr>
+          <p:nvPr/>
+        </p:nvPicPr>
+        <p:blipFill>
+          <a:blip r:embed="rId3">
+            <a:extLst>
+              <a:ext uri="{28A0092B-C50C-407E-A947-70E740481C1C}">
+                <a14:useLocalDpi xmlns:a14="http://schemas.microsoft.com/office/drawing/2010/main" val="0"/>
+              </a:ext>
+            </a:extLst>
+          </a:blip>
+          <a:stretch>
+            <a:fillRect/>
+          </a:stretch>
+        </p:blipFill>
+        <p:spPr>
+          <a:xfrm>
+            <a:off x="521207" y="1230210"/>
+            <a:ext cx="8634367" cy="4808126"/>
+          </a:xfrm>
+          <a:prstGeom prst="rect">
+            <a:avLst/>
+          </a:prstGeom>
+        </p:spPr>
+      </p:pic>
     </p:spTree>
     <p:extLst>
       <p:ext uri="{BB962C8B-B14F-4D97-AF65-F5344CB8AC3E}">
@@ -5623,7 +5723,7 @@
           <a:lstStyle/>
           <a:p>
             <a:r>
-              <a:rPr lang="en-US">
+              <a:rPr lang="en-US" dirty="0">
                 <a:latin typeface="Calibri" panose="020F0502020204030204" pitchFamily="34" charset="0"/>
                 <a:ea typeface="Calibri" panose="020F0502020204030204" pitchFamily="34" charset="0"/>
                 <a:cs typeface="Calibri" panose="020F0502020204030204" pitchFamily="34" charset="0"/>
@@ -5684,8 +5784,8 @@
         </p:nvSpPr>
         <p:spPr>
           <a:xfrm>
-            <a:off x="521208" y="782989"/>
-            <a:ext cx="3143040" cy="307777"/>
+            <a:off x="521208" y="782990"/>
+            <a:ext cx="3566297" cy="338554"/>
           </a:xfrm>
           <a:prstGeom prst="rect">
             <a:avLst/>
@@ -5699,21 +5799,325 @@
           <a:lstStyle/>
           <a:p>
             <a:r>
-              <a:rPr lang="en-GB" sz="1400" b="1" dirty="0">
+              <a:rPr lang="en-GB" sz="1600" b="1" dirty="0" err="1">
                 <a:effectLst/>
                 <a:latin typeface="Calibri" panose="020F0502020204030204" pitchFamily="34" charset="0"/>
                 <a:ea typeface="Calibri" panose="020F0502020204030204" pitchFamily="34" charset="0"/>
                 <a:cs typeface="Calibri" panose="020F0502020204030204" pitchFamily="34" charset="0"/>
               </a:rPr>
-              <a:t>Tools that were created and finally used</a:t>
-            </a:r>
+              <a:t>Waldiez</a:t>
+            </a:r>
+            <a:r>
+              <a:rPr lang="en-GB" sz="1600" b="1" dirty="0">
+                <a:effectLst/>
+                <a:latin typeface="Calibri" panose="020F0502020204030204" pitchFamily="34" charset="0"/>
+                <a:ea typeface="Calibri" panose="020F0502020204030204" pitchFamily="34" charset="0"/>
+                <a:cs typeface="Calibri" panose="020F0502020204030204" pitchFamily="34" charset="0"/>
+              </a:rPr>
+              <a:t> flow – Agent’s specific missions</a:t>
+            </a:r>
+          </a:p>
+        </p:txBody>
+      </p:sp>
+      <p:sp>
+        <p:nvSpPr>
+          <p:cNvPr id="7" name="TextBox 6">
+            <a:extLst>
+              <a:ext uri="{FF2B5EF4-FFF2-40B4-BE49-F238E27FC236}">
+                <a16:creationId xmlns:a16="http://schemas.microsoft.com/office/drawing/2014/main" id="{BC4900E9-0048-D23B-81C5-F19452935AF1}"/>
+              </a:ext>
+            </a:extLst>
+          </p:cNvPr>
+          <p:cNvSpPr txBox="1"/>
+          <p:nvPr/>
+        </p:nvSpPr>
+        <p:spPr>
+          <a:xfrm>
+            <a:off x="521208" y="1299659"/>
+            <a:ext cx="10936224" cy="3323987"/>
+          </a:xfrm>
+          <a:prstGeom prst="rect">
+            <a:avLst/>
+          </a:prstGeom>
+          <a:noFill/>
+        </p:spPr>
+        <p:txBody>
+          <a:bodyPr wrap="square" rtlCol="0">
+            <a:spAutoFit/>
+          </a:bodyPr>
+          <a:lstStyle/>
+          <a:p>
+            <a:r>
+              <a:rPr lang="en-GR" sz="1400" dirty="0">
+                <a:latin typeface="Calibri" panose="020F0502020204030204" pitchFamily="34" charset="0"/>
+                <a:cs typeface="Calibri" panose="020F0502020204030204" pitchFamily="34" charset="0"/>
+              </a:rPr>
+              <a:t>The Flow consists of four Agents. </a:t>
+            </a:r>
+          </a:p>
+          <a:p>
+            <a:r>
+              <a:rPr lang="en-GR" sz="1400" dirty="0">
+                <a:latin typeface="Calibri" panose="020F0502020204030204" pitchFamily="34" charset="0"/>
+                <a:cs typeface="Calibri" panose="020F0502020204030204" pitchFamily="34" charset="0"/>
+              </a:rPr>
+              <a:t>The Group Manager uses Speaker Selection Method: Default and every agent uses a Termination Method where a specific message is checked in the log.</a:t>
+            </a:r>
+          </a:p>
+          <a:p>
+            <a:pPr marL="285750" indent="-285750">
+              <a:buFont typeface="Arial" panose="020B0604020202020204" pitchFamily="34" charset="0"/>
+              <a:buChar char="•"/>
+            </a:pPr>
+            <a:endParaRPr lang="en-GR" sz="1400" b="1" dirty="0">
+              <a:latin typeface="Calibri" panose="020F0502020204030204" pitchFamily="34" charset="0"/>
+              <a:cs typeface="Calibri" panose="020F0502020204030204" pitchFamily="34" charset="0"/>
+            </a:endParaRPr>
+          </a:p>
+          <a:p>
+            <a:pPr marL="285750" indent="-285750">
+              <a:buFont typeface="Arial" panose="020B0604020202020204" pitchFamily="34" charset="0"/>
+              <a:buChar char="•"/>
+            </a:pPr>
+            <a:r>
+              <a:rPr lang="en-GR" sz="1400" b="1" dirty="0">
+                <a:latin typeface="Calibri" panose="020F0502020204030204" pitchFamily="34" charset="0"/>
+                <a:cs typeface="Calibri" panose="020F0502020204030204" pitchFamily="34" charset="0"/>
+              </a:rPr>
+              <a:t>Forensics (</a:t>
+            </a:r>
+            <a:r>
+              <a:rPr lang="en-GB" sz="1400" b="1" dirty="0">
+                <a:latin typeface="Calibri" panose="020F0502020204030204" pitchFamily="34" charset="0"/>
+                <a:cs typeface="Calibri" panose="020F0502020204030204" pitchFamily="34" charset="0"/>
+              </a:rPr>
+              <a:t>meta/llama-3.3-70b-instruct</a:t>
+            </a:r>
+            <a:r>
+              <a:rPr lang="en-GR" sz="1400" b="1" dirty="0">
+                <a:latin typeface="Calibri" panose="020F0502020204030204" pitchFamily="34" charset="0"/>
+                <a:cs typeface="Calibri" panose="020F0502020204030204" pitchFamily="34" charset="0"/>
+              </a:rPr>
+              <a:t>)</a:t>
+            </a:r>
+            <a:r>
+              <a:rPr lang="en-GR" sz="1400" dirty="0">
+                <a:latin typeface="Calibri" panose="020F0502020204030204" pitchFamily="34" charset="0"/>
+                <a:cs typeface="Calibri" panose="020F0502020204030204" pitchFamily="34" charset="0"/>
+              </a:rPr>
+              <a:t>: Responsible for initializing the crime scene. Uses </a:t>
+            </a:r>
+            <a:r>
+              <a:rPr lang="en-GB" sz="1400" dirty="0" err="1">
+                <a:latin typeface="Calibri" panose="020F0502020204030204" pitchFamily="34" charset="0"/>
+                <a:cs typeface="Calibri" panose="020F0502020204030204" pitchFamily="34" charset="0"/>
+              </a:rPr>
+              <a:t>construct_mansion_map</a:t>
+            </a:r>
+            <a:r>
+              <a:rPr lang="en-GB" sz="1400" dirty="0">
+                <a:latin typeface="Calibri" panose="020F0502020204030204" pitchFamily="34" charset="0"/>
+                <a:cs typeface="Calibri" panose="020F0502020204030204" pitchFamily="34" charset="0"/>
+              </a:rPr>
+              <a:t> tool to print and save in a file the map in </a:t>
+            </a:r>
+            <a:r>
+              <a:rPr lang="en-GB" sz="1400" dirty="0" err="1">
+                <a:latin typeface="Calibri" panose="020F0502020204030204" pitchFamily="34" charset="0"/>
+                <a:cs typeface="Calibri" panose="020F0502020204030204" pitchFamily="34" charset="0"/>
+              </a:rPr>
+              <a:t>json</a:t>
+            </a:r>
+            <a:r>
+              <a:rPr lang="en-GB" sz="1400" dirty="0">
+                <a:latin typeface="Calibri" panose="020F0502020204030204" pitchFamily="34" charset="0"/>
+                <a:cs typeface="Calibri" panose="020F0502020204030204" pitchFamily="34" charset="0"/>
+              </a:rPr>
+              <a:t> format for the other agents. Moreover lists the suspects, weapons and the status/last known location of the victim.</a:t>
+            </a:r>
+          </a:p>
+          <a:p>
+            <a:pPr marL="285750" indent="-285750">
+              <a:buFont typeface="Arial" panose="020B0604020202020204" pitchFamily="34" charset="0"/>
+              <a:buChar char="•"/>
+            </a:pPr>
+            <a:endParaRPr lang="en-GR" sz="1400" dirty="0">
+              <a:latin typeface="Calibri" panose="020F0502020204030204" pitchFamily="34" charset="0"/>
+              <a:cs typeface="Calibri" panose="020F0502020204030204" pitchFamily="34" charset="0"/>
+            </a:endParaRPr>
+          </a:p>
+          <a:p>
+            <a:pPr marL="285750" indent="-285750">
+              <a:buFont typeface="Arial" panose="020B0604020202020204" pitchFamily="34" charset="0"/>
+              <a:buChar char="•"/>
+            </a:pPr>
+            <a:r>
+              <a:rPr lang="en-GR" sz="1400" b="1" dirty="0">
+                <a:latin typeface="Calibri" panose="020F0502020204030204" pitchFamily="34" charset="0"/>
+                <a:cs typeface="Calibri" panose="020F0502020204030204" pitchFamily="34" charset="0"/>
+              </a:rPr>
+              <a:t>Detective (</a:t>
+            </a:r>
+            <a:r>
+              <a:rPr lang="en-GB" sz="1400" b="1" dirty="0" err="1">
+                <a:latin typeface="Calibri" panose="020F0502020204030204" pitchFamily="34" charset="0"/>
+                <a:cs typeface="Calibri" panose="020F0502020204030204" pitchFamily="34" charset="0"/>
+              </a:rPr>
+              <a:t>qwen</a:t>
+            </a:r>
+            <a:r>
+              <a:rPr lang="en-GB" sz="1400" b="1" dirty="0">
+                <a:latin typeface="Calibri" panose="020F0502020204030204" pitchFamily="34" charset="0"/>
+                <a:cs typeface="Calibri" panose="020F0502020204030204" pitchFamily="34" charset="0"/>
+              </a:rPr>
+              <a:t>/qwen2.5-7b-instruct</a:t>
+            </a:r>
+            <a:r>
+              <a:rPr lang="en-GR" sz="1400" b="1" dirty="0">
+                <a:latin typeface="Calibri" panose="020F0502020204030204" pitchFamily="34" charset="0"/>
+                <a:cs typeface="Calibri" panose="020F0502020204030204" pitchFamily="34" charset="0"/>
+              </a:rPr>
+              <a:t>)</a:t>
+            </a:r>
+            <a:r>
+              <a:rPr lang="en-GR" sz="1400" dirty="0">
+                <a:latin typeface="Calibri" panose="020F0502020204030204" pitchFamily="34" charset="0"/>
+                <a:cs typeface="Calibri" panose="020F0502020204030204" pitchFamily="34" charset="0"/>
+              </a:rPr>
+              <a:t>: Conducts the main investigation and provides a solution along with the reasoning for every choice.</a:t>
+            </a:r>
+          </a:p>
+          <a:p>
+            <a:pPr marL="285750" indent="-285750">
+              <a:buFont typeface="Arial" panose="020B0604020202020204" pitchFamily="34" charset="0"/>
+              <a:buChar char="•"/>
+            </a:pPr>
+            <a:endParaRPr lang="en-GR" sz="1400" dirty="0">
+              <a:latin typeface="Calibri" panose="020F0502020204030204" pitchFamily="34" charset="0"/>
+              <a:cs typeface="Calibri" panose="020F0502020204030204" pitchFamily="34" charset="0"/>
+            </a:endParaRPr>
+          </a:p>
+          <a:p>
+            <a:pPr marL="285750" indent="-285750">
+              <a:buFont typeface="Arial" panose="020B0604020202020204" pitchFamily="34" charset="0"/>
+              <a:buChar char="•"/>
+            </a:pPr>
+            <a:r>
+              <a:rPr lang="en-GR" sz="1400" b="1" dirty="0">
+                <a:latin typeface="Calibri" panose="020F0502020204030204" pitchFamily="34" charset="0"/>
+                <a:cs typeface="Calibri" panose="020F0502020204030204" pitchFamily="34" charset="0"/>
+              </a:rPr>
+              <a:t>Auditor (</a:t>
+            </a:r>
+            <a:r>
+              <a:rPr lang="en-GB" sz="1400" b="1" dirty="0" err="1">
+                <a:latin typeface="Calibri" panose="020F0502020204030204" pitchFamily="34" charset="0"/>
+                <a:cs typeface="Calibri" panose="020F0502020204030204" pitchFamily="34" charset="0"/>
+              </a:rPr>
+              <a:t>qwen</a:t>
+            </a:r>
+            <a:r>
+              <a:rPr lang="en-GB" sz="1400" b="1" dirty="0">
+                <a:latin typeface="Calibri" panose="020F0502020204030204" pitchFamily="34" charset="0"/>
+                <a:cs typeface="Calibri" panose="020F0502020204030204" pitchFamily="34" charset="0"/>
+              </a:rPr>
+              <a:t>/qwen2.5-7b-instruct</a:t>
+            </a:r>
+            <a:r>
+              <a:rPr lang="en-GR" sz="1400" b="1" dirty="0">
+                <a:latin typeface="Calibri" panose="020F0502020204030204" pitchFamily="34" charset="0"/>
+                <a:cs typeface="Calibri" panose="020F0502020204030204" pitchFamily="34" charset="0"/>
+              </a:rPr>
+              <a:t>)</a:t>
+            </a:r>
+            <a:r>
+              <a:rPr lang="en-GR" sz="1400" dirty="0">
+                <a:latin typeface="Calibri" panose="020F0502020204030204" pitchFamily="34" charset="0"/>
+                <a:cs typeface="Calibri" panose="020F0502020204030204" pitchFamily="34" charset="0"/>
+              </a:rPr>
+              <a:t>: Responsible to check, verify and correct (or not) the answer from the Detective agent.</a:t>
+            </a:r>
+          </a:p>
+          <a:p>
+            <a:pPr marL="285750" indent="-285750">
+              <a:buFont typeface="Arial" panose="020B0604020202020204" pitchFamily="34" charset="0"/>
+              <a:buChar char="•"/>
+            </a:pPr>
+            <a:endParaRPr lang="en-GR" sz="1400" dirty="0">
+              <a:latin typeface="Calibri" panose="020F0502020204030204" pitchFamily="34" charset="0"/>
+              <a:cs typeface="Calibri" panose="020F0502020204030204" pitchFamily="34" charset="0"/>
+            </a:endParaRPr>
+          </a:p>
+          <a:p>
+            <a:pPr marL="285750" indent="-285750">
+              <a:buFont typeface="Arial" panose="020B0604020202020204" pitchFamily="34" charset="0"/>
+              <a:buChar char="•"/>
+            </a:pPr>
+            <a:endParaRPr lang="en-GR" sz="1400" dirty="0">
+              <a:latin typeface="Calibri" panose="020F0502020204030204" pitchFamily="34" charset="0"/>
+              <a:cs typeface="Calibri" panose="020F0502020204030204" pitchFamily="34" charset="0"/>
+            </a:endParaRPr>
+          </a:p>
+          <a:p>
+            <a:pPr marL="285750" indent="-285750">
+              <a:buFont typeface="Arial" panose="020B0604020202020204" pitchFamily="34" charset="0"/>
+              <a:buChar char="•"/>
+            </a:pPr>
+            <a:r>
+              <a:rPr lang="en-GR" sz="1400" b="1" dirty="0">
+                <a:latin typeface="Calibri" panose="020F0502020204030204" pitchFamily="34" charset="0"/>
+                <a:cs typeface="Calibri" panose="020F0502020204030204" pitchFamily="34" charset="0"/>
+              </a:rPr>
+              <a:t>Archivist (</a:t>
+            </a:r>
+            <a:r>
+              <a:rPr lang="en-GB" sz="1400" b="1" dirty="0">
+                <a:latin typeface="Calibri" panose="020F0502020204030204" pitchFamily="34" charset="0"/>
+                <a:cs typeface="Calibri" panose="020F0502020204030204" pitchFamily="34" charset="0"/>
+              </a:rPr>
+              <a:t>meta/llama-3.3-70b-instruct</a:t>
+            </a:r>
+            <a:r>
+              <a:rPr lang="en-GR" sz="1400" b="1" dirty="0">
+                <a:latin typeface="Calibri" panose="020F0502020204030204" pitchFamily="34" charset="0"/>
+                <a:cs typeface="Calibri" panose="020F0502020204030204" pitchFamily="34" charset="0"/>
+              </a:rPr>
+              <a:t>)</a:t>
+            </a:r>
+            <a:r>
+              <a:rPr lang="en-GR" sz="1400" dirty="0">
+                <a:latin typeface="Calibri" panose="020F0502020204030204" pitchFamily="34" charset="0"/>
+                <a:cs typeface="Calibri" panose="020F0502020204030204" pitchFamily="34" charset="0"/>
+              </a:rPr>
+              <a:t>: Responsible to save the final answer to a file using the desired format.</a:t>
+            </a:r>
+          </a:p>
+          <a:p>
+            <a:pPr marL="285750" indent="-285750">
+              <a:buFont typeface="Arial" panose="020B0604020202020204" pitchFamily="34" charset="0"/>
+              <a:buChar char="•"/>
+            </a:pPr>
+            <a:endParaRPr lang="en-GR" sz="1400" dirty="0">
+              <a:latin typeface="Calibri" panose="020F0502020204030204" pitchFamily="34" charset="0"/>
+              <a:cs typeface="Calibri" panose="020F0502020204030204" pitchFamily="34" charset="0"/>
+            </a:endParaRPr>
+          </a:p>
+          <a:p>
+            <a:pPr marL="285750" indent="-285750">
+              <a:buFont typeface="Arial" panose="020B0604020202020204" pitchFamily="34" charset="0"/>
+              <a:buChar char="•"/>
+            </a:pPr>
+            <a:endParaRPr lang="en-GR" sz="1400" dirty="0">
+              <a:latin typeface="Calibri" panose="020F0502020204030204" pitchFamily="34" charset="0"/>
+              <a:cs typeface="Calibri" panose="020F0502020204030204" pitchFamily="34" charset="0"/>
+            </a:endParaRPr>
           </a:p>
         </p:txBody>
       </p:sp>
     </p:spTree>
     <p:extLst>
       <p:ext uri="{BB962C8B-B14F-4D97-AF65-F5344CB8AC3E}">
-        <p14:creationId xmlns:p14="http://schemas.microsoft.com/office/powerpoint/2010/main" val="1950404544"/>
+        <p14:creationId xmlns:p14="http://schemas.microsoft.com/office/powerpoint/2010/main" val="3634602537"/>
       </p:ext>
     </p:extLst>
   </p:cSld>
@@ -5811,6 +6215,267 @@
       </p:sp>
       <p:sp>
         <p:nvSpPr>
+          <p:cNvPr id="5" name="TextBox 4">
+            <a:extLst>
+              <a:ext uri="{FF2B5EF4-FFF2-40B4-BE49-F238E27FC236}">
+                <a16:creationId xmlns:a16="http://schemas.microsoft.com/office/drawing/2014/main" id="{2EDBEA45-F45D-D956-D333-E2116AEAC6CC}"/>
+              </a:ext>
+            </a:extLst>
+          </p:cNvPr>
+          <p:cNvSpPr txBox="1"/>
+          <p:nvPr/>
+        </p:nvSpPr>
+        <p:spPr>
+          <a:xfrm>
+            <a:off x="521208" y="782989"/>
+            <a:ext cx="2178930" cy="338554"/>
+          </a:xfrm>
+          <a:prstGeom prst="rect">
+            <a:avLst/>
+          </a:prstGeom>
+          <a:noFill/>
+        </p:spPr>
+        <p:txBody>
+          <a:bodyPr wrap="none" rtlCol="0">
+            <a:spAutoFit/>
+          </a:bodyPr>
+          <a:lstStyle/>
+          <a:p>
+            <a:r>
+              <a:rPr lang="en-GB" sz="1600" b="1" dirty="0">
+                <a:effectLst/>
+                <a:latin typeface="Calibri" panose="020F0502020204030204" pitchFamily="34" charset="0"/>
+                <a:ea typeface="Calibri" panose="020F0502020204030204" pitchFamily="34" charset="0"/>
+                <a:cs typeface="Calibri" panose="020F0502020204030204" pitchFamily="34" charset="0"/>
+              </a:rPr>
+              <a:t>Tools that were created</a:t>
+            </a:r>
+          </a:p>
+        </p:txBody>
+      </p:sp>
+      <p:sp>
+        <p:nvSpPr>
+          <p:cNvPr id="2" name="TextBox 1">
+            <a:extLst>
+              <a:ext uri="{FF2B5EF4-FFF2-40B4-BE49-F238E27FC236}">
+                <a16:creationId xmlns:a16="http://schemas.microsoft.com/office/drawing/2014/main" id="{8F818F69-CF7C-6BE8-FBE0-99E6B525FB89}"/>
+              </a:ext>
+            </a:extLst>
+          </p:cNvPr>
+          <p:cNvSpPr txBox="1"/>
+          <p:nvPr/>
+        </p:nvSpPr>
+        <p:spPr>
+          <a:xfrm>
+            <a:off x="521208" y="1408046"/>
+            <a:ext cx="7893587" cy="1815882"/>
+          </a:xfrm>
+          <a:prstGeom prst="rect">
+            <a:avLst/>
+          </a:prstGeom>
+          <a:noFill/>
+        </p:spPr>
+        <p:txBody>
+          <a:bodyPr wrap="square" rtlCol="0">
+            <a:spAutoFit/>
+          </a:bodyPr>
+          <a:lstStyle/>
+          <a:p>
+            <a:pPr marL="285750" indent="-285750">
+              <a:buFont typeface="Arial" panose="020B0604020202020204" pitchFamily="34" charset="0"/>
+              <a:buChar char="•"/>
+            </a:pPr>
+            <a:r>
+              <a:rPr lang="en-GB" sz="1400" b="1" dirty="0" err="1"/>
+              <a:t>construct_mansion_map</a:t>
+            </a:r>
+            <a:r>
+              <a:rPr lang="en-GB" sz="1400" b="1" dirty="0"/>
+              <a:t>: </a:t>
+            </a:r>
+            <a:r>
+              <a:rPr lang="en-GB" sz="1400" dirty="0"/>
+              <a:t>Used for movement verification from Detective/Auditor. </a:t>
+            </a:r>
+          </a:p>
+          <a:p>
+            <a:pPr marL="285750" indent="-285750">
+              <a:buFont typeface="Arial" panose="020B0604020202020204" pitchFamily="34" charset="0"/>
+              <a:buChar char="•"/>
+            </a:pPr>
+            <a:endParaRPr lang="en-GB" sz="1400" dirty="0"/>
+          </a:p>
+          <a:p>
+            <a:pPr marL="285750" indent="-285750">
+              <a:buFont typeface="Arial" panose="020B0604020202020204" pitchFamily="34" charset="0"/>
+              <a:buChar char="•"/>
+            </a:pPr>
+            <a:r>
+              <a:rPr lang="en-GB" sz="1400" b="1" dirty="0" err="1"/>
+              <a:t>save_final_answer</a:t>
+            </a:r>
+            <a:r>
+              <a:rPr lang="en-GB" sz="1400" b="1" dirty="0"/>
+              <a:t>: </a:t>
+            </a:r>
+            <a:r>
+              <a:rPr lang="en-GB" sz="1400" dirty="0"/>
+              <a:t>Used to save the final answer to a file in the desired format.</a:t>
+            </a:r>
+          </a:p>
+          <a:p>
+            <a:pPr marL="285750" indent="-285750">
+              <a:buFont typeface="Arial" panose="020B0604020202020204" pitchFamily="34" charset="0"/>
+              <a:buChar char="•"/>
+            </a:pPr>
+            <a:endParaRPr lang="en-GB" sz="1400" dirty="0"/>
+          </a:p>
+          <a:p>
+            <a:pPr marL="285750" indent="-285750">
+              <a:buFont typeface="Arial" panose="020B0604020202020204" pitchFamily="34" charset="0"/>
+              <a:buChar char="•"/>
+            </a:pPr>
+            <a:r>
+              <a:rPr lang="en-GB" sz="1400" b="1" dirty="0" err="1"/>
+              <a:t>verify_and_log</a:t>
+            </a:r>
+            <a:r>
+              <a:rPr lang="en-GB" sz="1400" b="1" dirty="0"/>
+              <a:t> (not used): </a:t>
+            </a:r>
+            <a:r>
+              <a:rPr lang="en-GB" sz="1400" dirty="0"/>
+              <a:t>Save the facts that derive from the analysis of the clues and based on that either verify or exclude suspects etc.</a:t>
+            </a:r>
+          </a:p>
+          <a:p>
+            <a:pPr marL="285750" indent="-285750">
+              <a:buFont typeface="Arial" panose="020B0604020202020204" pitchFamily="34" charset="0"/>
+              <a:buChar char="•"/>
+            </a:pPr>
+            <a:endParaRPr lang="en-GB" sz="1400" dirty="0"/>
+          </a:p>
+          <a:p>
+            <a:pPr marL="285750" indent="-285750">
+              <a:buFont typeface="Arial" panose="020B0604020202020204" pitchFamily="34" charset="0"/>
+              <a:buChar char="•"/>
+            </a:pPr>
+            <a:r>
+              <a:rPr lang="en-GB" sz="1400" b="1" dirty="0" err="1"/>
+              <a:t>audit_and_finalize_case</a:t>
+            </a:r>
+            <a:r>
+              <a:rPr lang="en-GB" sz="1400" b="1" dirty="0"/>
+              <a:t> (not used): </a:t>
+            </a:r>
+            <a:r>
+              <a:rPr lang="en-GB" sz="1400" dirty="0"/>
+              <a:t>Save both the answer of the Detective and the Auditor.</a:t>
+            </a:r>
+          </a:p>
+        </p:txBody>
+      </p:sp>
+    </p:spTree>
+    <p:extLst>
+      <p:ext uri="{BB962C8B-B14F-4D97-AF65-F5344CB8AC3E}">
+        <p14:creationId xmlns:p14="http://schemas.microsoft.com/office/powerpoint/2010/main" val="1950404544"/>
+      </p:ext>
+    </p:extLst>
+  </p:cSld>
+  <p:clrMapOvr>
+    <a:masterClrMapping/>
+  </p:clrMapOvr>
+</p:sld>
+</file>
+
+<file path=ppt/slides/slide5.xml><?xml version="1.0" encoding="utf-8"?>
+<p:sld xmlns:a="http://schemas.openxmlformats.org/drawingml/2006/main" xmlns:r="http://schemas.openxmlformats.org/officeDocument/2006/relationships" xmlns:p="http://schemas.openxmlformats.org/presentationml/2006/main">
+  <p:cSld>
+    <p:spTree>
+      <p:nvGrpSpPr>
+        <p:cNvPr id="1" name=""/>
+        <p:cNvGrpSpPr/>
+        <p:nvPr/>
+      </p:nvGrpSpPr>
+      <p:grpSpPr>
+        <a:xfrm>
+          <a:off x="0" y="0"/>
+          <a:ext cx="0" cy="0"/>
+          <a:chOff x="0" y="0"/>
+          <a:chExt cx="0" cy="0"/>
+        </a:xfrm>
+      </p:grpSpPr>
+      <p:sp>
+        <p:nvSpPr>
+          <p:cNvPr id="3" name="Footer Placeholder 2">
+            <a:extLst>
+              <a:ext uri="{FF2B5EF4-FFF2-40B4-BE49-F238E27FC236}">
+                <a16:creationId xmlns:a16="http://schemas.microsoft.com/office/drawing/2014/main" id="{8A260236-8C60-545F-DD8F-8399F06E1366}"/>
+              </a:ext>
+            </a:extLst>
+          </p:cNvPr>
+          <p:cNvSpPr>
+            <a:spLocks noGrp="1"/>
+          </p:cNvSpPr>
+          <p:nvPr>
+            <p:ph type="ftr" sz="quarter" idx="11"/>
+          </p:nvPr>
+        </p:nvSpPr>
+        <p:spPr/>
+        <p:txBody>
+          <a:bodyPr/>
+          <a:lstStyle/>
+          <a:p>
+            <a:r>
+              <a:rPr lang="en-US">
+                <a:latin typeface="Calibri" panose="020F0502020204030204" pitchFamily="34" charset="0"/>
+                <a:ea typeface="Calibri" panose="020F0502020204030204" pitchFamily="34" charset="0"/>
+                <a:cs typeface="Calibri" panose="020F0502020204030204" pitchFamily="34" charset="0"/>
+              </a:rPr>
+              <a:t>MSc Artificial Intelligence &amp; Deep Learning</a:t>
+            </a:r>
+          </a:p>
+        </p:txBody>
+      </p:sp>
+      <p:sp>
+        <p:nvSpPr>
+          <p:cNvPr id="4" name="Slide Number Placeholder 3">
+            <a:extLst>
+              <a:ext uri="{FF2B5EF4-FFF2-40B4-BE49-F238E27FC236}">
+                <a16:creationId xmlns:a16="http://schemas.microsoft.com/office/drawing/2014/main" id="{7B8C5727-8184-BAD8-0C16-4E7213239DDD}"/>
+              </a:ext>
+            </a:extLst>
+          </p:cNvPr>
+          <p:cNvSpPr>
+            <a:spLocks noGrp="1"/>
+          </p:cNvSpPr>
+          <p:nvPr>
+            <p:ph type="sldNum" sz="quarter" idx="12"/>
+          </p:nvPr>
+        </p:nvSpPr>
+        <p:spPr/>
+        <p:txBody>
+          <a:bodyPr/>
+          <a:lstStyle/>
+          <a:p>
+            <a:fld id="{148CC95F-0247-41B6-91CF-DC97C76A7088}" type="slidenum">
+              <a:rPr lang="en-US" smtClean="0">
+                <a:latin typeface="Calibri" panose="020F0502020204030204" pitchFamily="34" charset="0"/>
+                <a:ea typeface="Calibri" panose="020F0502020204030204" pitchFamily="34" charset="0"/>
+                <a:cs typeface="Calibri" panose="020F0502020204030204" pitchFamily="34" charset="0"/>
+              </a:rPr>
+              <a:t>5</a:t>
+            </a:fld>
+            <a:endParaRPr lang="en-US">
+              <a:latin typeface="Calibri" panose="020F0502020204030204" pitchFamily="34" charset="0"/>
+              <a:ea typeface="Calibri" panose="020F0502020204030204" pitchFamily="34" charset="0"/>
+              <a:cs typeface="Calibri" panose="020F0502020204030204" pitchFamily="34" charset="0"/>
+            </a:endParaRPr>
+          </a:p>
+        </p:txBody>
+      </p:sp>
+      <p:sp>
+        <p:nvSpPr>
           <p:cNvPr id="2" name="TextBox 1">
             <a:extLst>
               <a:ext uri="{FF2B5EF4-FFF2-40B4-BE49-F238E27FC236}">
@@ -5845,7 +6510,7 @@
               </a:spcAft>
             </a:pPr>
             <a:r>
-              <a:rPr lang="en-US" sz="1400" b="1" dirty="0">
+              <a:rPr lang="en-US" sz="1600" b="1" dirty="0">
                 <a:solidFill>
                   <a:schemeClr val="tx2"/>
                 </a:solidFill>
@@ -9764,7 +10429,7 @@
 </p:sld>
 </file>
 
-<file path=ppt/slides/slide5.xml><?xml version="1.0" encoding="utf-8"?>
+<file path=ppt/slides/slide6.xml><?xml version="1.0" encoding="utf-8"?>
 <p:sld xmlns:a="http://schemas.openxmlformats.org/drawingml/2006/main" xmlns:r="http://schemas.openxmlformats.org/officeDocument/2006/relationships" xmlns:p="http://schemas.openxmlformats.org/presentationml/2006/main">
   <p:cSld>
     <p:spTree>
@@ -9840,7 +10505,7 @@
                 <a:ea typeface="Calibri" panose="020F0502020204030204" pitchFamily="34" charset="0"/>
                 <a:cs typeface="Calibri" panose="020F0502020204030204" pitchFamily="34" charset="0"/>
               </a:rPr>
-              <a:t>5</a:t>
+              <a:t>6</a:t>
             </a:fld>
             <a:endParaRPr lang="en-US">
               <a:latin typeface="Calibri" panose="020F0502020204030204" pitchFamily="34" charset="0"/>
@@ -9865,7 +10530,7 @@
         <p:spPr>
           <a:xfrm>
             <a:off x="521208" y="750098"/>
-            <a:ext cx="2226763" cy="523220"/>
+            <a:ext cx="2523448" cy="584775"/>
           </a:xfrm>
           <a:prstGeom prst="rect">
             <a:avLst/>
@@ -9879,7 +10544,7 @@
           <a:lstStyle/>
           <a:p>
             <a:r>
-              <a:rPr lang="en-GB" sz="1400" b="1" dirty="0">
+              <a:rPr lang="en-GB" sz="1600" b="1" dirty="0">
                 <a:latin typeface="Calibri" panose="020F0502020204030204" pitchFamily="34" charset="0"/>
                 <a:ea typeface="Calibri" panose="020F0502020204030204" pitchFamily="34" charset="0"/>
                 <a:cs typeface="Calibri" panose="020F0502020204030204" pitchFamily="34" charset="0"/>
@@ -9887,7 +10552,7 @@
               <a:t>W</a:t>
             </a:r>
             <a:r>
-              <a:rPr lang="en-GB" sz="1400" b="1" dirty="0">
+              <a:rPr lang="en-GB" sz="1600" b="1" dirty="0">
                 <a:effectLst/>
                 <a:latin typeface="Calibri" panose="020F0502020204030204" pitchFamily="34" charset="0"/>
                 <a:ea typeface="Calibri" panose="020F0502020204030204" pitchFamily="34" charset="0"/>
@@ -9898,7 +10563,7 @@
           </a:p>
           <a:p>
             <a:r>
-              <a:rPr lang="en-GB" sz="1400" b="1" dirty="0">
+              <a:rPr lang="en-GB" sz="1600" b="1" dirty="0">
                 <a:latin typeface="Calibri" panose="020F0502020204030204" pitchFamily="34" charset="0"/>
                 <a:ea typeface="Calibri" panose="020F0502020204030204" pitchFamily="34" charset="0"/>
                 <a:cs typeface="Calibri" panose="020F0502020204030204" pitchFamily="34" charset="0"/>
@@ -9906,7 +10571,7 @@
               <a:t>W</a:t>
             </a:r>
             <a:r>
-              <a:rPr lang="en-GB" sz="1400" b="1" dirty="0">
+              <a:rPr lang="en-GB" sz="1600" b="1" dirty="0">
                 <a:effectLst/>
                 <a:latin typeface="Calibri" panose="020F0502020204030204" pitchFamily="34" charset="0"/>
                 <a:ea typeface="Calibri" panose="020F0502020204030204" pitchFamily="34" charset="0"/>
@@ -9930,7 +10595,7 @@
 </p:sld>
 </file>
 
-<file path=ppt/slides/slide6.xml><?xml version="1.0" encoding="utf-8"?>
+<file path=ppt/slides/slide7.xml><?xml version="1.0" encoding="utf-8"?>
 <p:sld xmlns:a="http://schemas.openxmlformats.org/drawingml/2006/main" xmlns:r="http://schemas.openxmlformats.org/officeDocument/2006/relationships" xmlns:p="http://schemas.openxmlformats.org/presentationml/2006/main">
   <p:cSld>
     <p:bg>
@@ -10144,7 +10809,7 @@
                 <a:ea typeface="Calibri" panose="020F0502020204030204" pitchFamily="34" charset="0"/>
                 <a:cs typeface="Calibri" panose="020F0502020204030204" pitchFamily="34" charset="0"/>
               </a:rPr>
-              <a:t>6</a:t>
+              <a:t>7</a:t>
             </a:fld>
             <a:endParaRPr lang="en-US">
               <a:latin typeface="Calibri" panose="020F0502020204030204" pitchFamily="34" charset="0"/>

--- a/Waldiez_finalPresentation.pptx
+++ b/Waldiez_finalPresentation.pptx
@@ -251,7 +251,7 @@
           <a:p>
             <a:fld id="{5AF42606-CFC7-4350-BF7D-F79705CBB3DF}" type="datetimeFigureOut">
               <a:rPr lang="el-GR" smtClean="0"/>
-              <a:t>25/2/26</a:t>
+              <a:t>26/2/2026</a:t>
             </a:fld>
             <a:endParaRPr lang="el-GR"/>
           </a:p>
@@ -437,7 +437,7 @@
           <a:p>
             <a:fld id="{F07D7115-7C26-4374-AB2C-A3EA9DC26E87}" type="datetimeFigureOut">
               <a:rPr lang="el-GR" smtClean="0"/>
-              <a:t>25/2/26</a:t>
+              <a:t>26/2/2026</a:t>
             </a:fld>
             <a:endParaRPr lang="el-GR"/>
           </a:p>
@@ -5834,7 +5834,7 @@
         <p:spPr>
           <a:xfrm>
             <a:off x="521208" y="1299659"/>
-            <a:ext cx="10936224" cy="3323987"/>
+            <a:ext cx="10936224" cy="3539430"/>
           </a:xfrm>
           <a:prstGeom prst="rect">
             <a:avLst/>
@@ -5933,7 +5933,21 @@
                 <a:latin typeface="Calibri" panose="020F0502020204030204" pitchFamily="34" charset="0"/>
                 <a:cs typeface="Calibri" panose="020F0502020204030204" pitchFamily="34" charset="0"/>
               </a:rPr>
-              <a:t> format for the other agents. Moreover lists the suspects, weapons and the status/last known location of the victim.</a:t>
+              <a:t> format for the other agents. </a:t>
+            </a:r>
+            <a:r>
+              <a:rPr lang="en-US" sz="1400" dirty="0">
+                <a:latin typeface="Calibri" panose="020F0502020204030204" pitchFamily="34" charset="0"/>
+                <a:cs typeface="Calibri" panose="020F0502020204030204" pitchFamily="34" charset="0"/>
+              </a:rPr>
+              <a:t>Also</a:t>
+            </a:r>
+            <a:r>
+              <a:rPr lang="en-GB" sz="1400" dirty="0">
+                <a:latin typeface="Calibri" panose="020F0502020204030204" pitchFamily="34" charset="0"/>
+                <a:cs typeface="Calibri" panose="020F0502020204030204" pitchFamily="34" charset="0"/>
+              </a:rPr>
+              <a:t> lists the suspects, weapons and the status/last known location of the victim.</a:t>
             </a:r>
           </a:p>
           <a:p>
@@ -5986,6 +6000,54 @@
               </a:rPr>
               <a:t>: Conducts the main investigation and provides a solution along with the reasoning for every choice.</a:t>
             </a:r>
+            <a:endParaRPr lang="en-US" sz="1400" dirty="0">
+              <a:latin typeface="Calibri" panose="020F0502020204030204" pitchFamily="34" charset="0"/>
+              <a:cs typeface="Calibri" panose="020F0502020204030204" pitchFamily="34" charset="0"/>
+            </a:endParaRPr>
+          </a:p>
+          <a:p>
+            <a:pPr marL="285750" indent="-285750">
+              <a:buFont typeface="Arial" panose="020B0604020202020204" pitchFamily="34" charset="0"/>
+              <a:buChar char="•"/>
+            </a:pPr>
+            <a:endParaRPr lang="en-US" sz="1400" dirty="0">
+              <a:latin typeface="Calibri" panose="020F0502020204030204" pitchFamily="34" charset="0"/>
+              <a:cs typeface="Calibri" panose="020F0502020204030204" pitchFamily="34" charset="0"/>
+            </a:endParaRPr>
+          </a:p>
+          <a:p>
+            <a:pPr marL="285750" indent="-285750">
+              <a:buFont typeface="Arial" panose="020B0604020202020204" pitchFamily="34" charset="0"/>
+              <a:buChar char="•"/>
+            </a:pPr>
+            <a:r>
+              <a:rPr lang="en-GR" sz="1400" b="1" dirty="0">
+                <a:latin typeface="Calibri" panose="020F0502020204030204" pitchFamily="34" charset="0"/>
+                <a:cs typeface="Calibri" panose="020F0502020204030204" pitchFamily="34" charset="0"/>
+              </a:rPr>
+              <a:t>Archivist (</a:t>
+            </a:r>
+            <a:r>
+              <a:rPr lang="en-GB" sz="1400" b="1" dirty="0">
+                <a:latin typeface="Calibri" panose="020F0502020204030204" pitchFamily="34" charset="0"/>
+                <a:cs typeface="Calibri" panose="020F0502020204030204" pitchFamily="34" charset="0"/>
+              </a:rPr>
+              <a:t>meta/llama-3.3-70b-instruct</a:t>
+            </a:r>
+            <a:r>
+              <a:rPr lang="en-GR" sz="1400" b="1" dirty="0">
+                <a:latin typeface="Calibri" panose="020F0502020204030204" pitchFamily="34" charset="0"/>
+                <a:cs typeface="Calibri" panose="020F0502020204030204" pitchFamily="34" charset="0"/>
+              </a:rPr>
+              <a:t>)</a:t>
+            </a:r>
+            <a:r>
+              <a:rPr lang="en-GR" sz="1400" dirty="0">
+                <a:latin typeface="Calibri" panose="020F0502020204030204" pitchFamily="34" charset="0"/>
+                <a:cs typeface="Calibri" panose="020F0502020204030204" pitchFamily="34" charset="0"/>
+              </a:rPr>
+              <a:t>: Responsible to save the final answer to a file using the desired format.</a:t>
+            </a:r>
           </a:p>
           <a:p>
             <a:pPr marL="285750" indent="-285750">
@@ -6057,40 +6119,6 @@
               <a:latin typeface="Calibri" panose="020F0502020204030204" pitchFamily="34" charset="0"/>
               <a:cs typeface="Calibri" panose="020F0502020204030204" pitchFamily="34" charset="0"/>
             </a:endParaRPr>
-          </a:p>
-          <a:p>
-            <a:pPr marL="285750" indent="-285750">
-              <a:buFont typeface="Arial" panose="020B0604020202020204" pitchFamily="34" charset="0"/>
-              <a:buChar char="•"/>
-            </a:pPr>
-            <a:r>
-              <a:rPr lang="en-GR" sz="1400" b="1" dirty="0">
-                <a:latin typeface="Calibri" panose="020F0502020204030204" pitchFamily="34" charset="0"/>
-                <a:cs typeface="Calibri" panose="020F0502020204030204" pitchFamily="34" charset="0"/>
-              </a:rPr>
-              <a:t>Archivist (</a:t>
-            </a:r>
-            <a:r>
-              <a:rPr lang="en-GB" sz="1400" b="1" dirty="0">
-                <a:latin typeface="Calibri" panose="020F0502020204030204" pitchFamily="34" charset="0"/>
-                <a:cs typeface="Calibri" panose="020F0502020204030204" pitchFamily="34" charset="0"/>
-              </a:rPr>
-              <a:t>meta/llama-3.3-70b-instruct</a:t>
-            </a:r>
-            <a:r>
-              <a:rPr lang="en-GR" sz="1400" b="1" dirty="0">
-                <a:latin typeface="Calibri" panose="020F0502020204030204" pitchFamily="34" charset="0"/>
-                <a:cs typeface="Calibri" panose="020F0502020204030204" pitchFamily="34" charset="0"/>
-              </a:rPr>
-              <a:t>)</a:t>
-            </a:r>
-            <a:r>
-              <a:rPr lang="en-GR" sz="1400" dirty="0">
-                <a:latin typeface="Calibri" panose="020F0502020204030204" pitchFamily="34" charset="0"/>
-                <a:cs typeface="Calibri" panose="020F0502020204030204" pitchFamily="34" charset="0"/>
-              </a:rPr>
-              <a:t>: Responsible to save the final answer to a file using the desired format.</a:t>
-            </a:r>
           </a:p>
           <a:p>
             <a:pPr marL="285750" indent="-285750">
@@ -6286,15 +6314,27 @@
               <a:buChar char="•"/>
             </a:pPr>
             <a:r>
-              <a:rPr lang="en-GB" sz="1400" b="1" dirty="0" err="1"/>
+              <a:rPr lang="en-GB" sz="1400" b="1" dirty="0" err="1">
+                <a:latin typeface="Calibri" panose="020F0502020204030204" pitchFamily="34" charset="0"/>
+                <a:ea typeface="Calibri" panose="020F0502020204030204" pitchFamily="34" charset="0"/>
+                <a:cs typeface="Calibri" panose="020F0502020204030204" pitchFamily="34" charset="0"/>
+              </a:rPr>
               <a:t>construct_mansion_map</a:t>
             </a:r>
             <a:r>
-              <a:rPr lang="en-GB" sz="1400" b="1" dirty="0"/>
+              <a:rPr lang="en-GB" sz="1400" b="1" dirty="0">
+                <a:latin typeface="Calibri" panose="020F0502020204030204" pitchFamily="34" charset="0"/>
+                <a:ea typeface="Calibri" panose="020F0502020204030204" pitchFamily="34" charset="0"/>
+                <a:cs typeface="Calibri" panose="020F0502020204030204" pitchFamily="34" charset="0"/>
+              </a:rPr>
               <a:t>: </a:t>
             </a:r>
             <a:r>
-              <a:rPr lang="en-GB" sz="1400" dirty="0"/>
+              <a:rPr lang="en-GB" sz="1400" dirty="0">
+                <a:latin typeface="Calibri" panose="020F0502020204030204" pitchFamily="34" charset="0"/>
+                <a:ea typeface="Calibri" panose="020F0502020204030204" pitchFamily="34" charset="0"/>
+                <a:cs typeface="Calibri" panose="020F0502020204030204" pitchFamily="34" charset="0"/>
+              </a:rPr>
               <a:t>Used for movement verification from Detective/Auditor. </a:t>
             </a:r>
           </a:p>
@@ -6303,7 +6343,11 @@
               <a:buFont typeface="Arial" panose="020B0604020202020204" pitchFamily="34" charset="0"/>
               <a:buChar char="•"/>
             </a:pPr>
-            <a:endParaRPr lang="en-GB" sz="1400" dirty="0"/>
+            <a:endParaRPr lang="en-GB" sz="1400" dirty="0">
+              <a:latin typeface="Calibri" panose="020F0502020204030204" pitchFamily="34" charset="0"/>
+              <a:ea typeface="Calibri" panose="020F0502020204030204" pitchFamily="34" charset="0"/>
+              <a:cs typeface="Calibri" panose="020F0502020204030204" pitchFamily="34" charset="0"/>
+            </a:endParaRPr>
           </a:p>
           <a:p>
             <a:pPr marL="285750" indent="-285750">
@@ -6311,15 +6355,27 @@
               <a:buChar char="•"/>
             </a:pPr>
             <a:r>
-              <a:rPr lang="en-GB" sz="1400" b="1" dirty="0" err="1"/>
+              <a:rPr lang="en-GB" sz="1400" b="1" dirty="0" err="1">
+                <a:latin typeface="Calibri" panose="020F0502020204030204" pitchFamily="34" charset="0"/>
+                <a:ea typeface="Calibri" panose="020F0502020204030204" pitchFamily="34" charset="0"/>
+                <a:cs typeface="Calibri" panose="020F0502020204030204" pitchFamily="34" charset="0"/>
+              </a:rPr>
               <a:t>save_final_answer</a:t>
             </a:r>
             <a:r>
-              <a:rPr lang="en-GB" sz="1400" b="1" dirty="0"/>
+              <a:rPr lang="en-GB" sz="1400" b="1" dirty="0">
+                <a:latin typeface="Calibri" panose="020F0502020204030204" pitchFamily="34" charset="0"/>
+                <a:ea typeface="Calibri" panose="020F0502020204030204" pitchFamily="34" charset="0"/>
+                <a:cs typeface="Calibri" panose="020F0502020204030204" pitchFamily="34" charset="0"/>
+              </a:rPr>
               <a:t>: </a:t>
             </a:r>
             <a:r>
-              <a:rPr lang="en-GB" sz="1400" dirty="0"/>
+              <a:rPr lang="en-GB" sz="1400" dirty="0">
+                <a:latin typeface="Calibri" panose="020F0502020204030204" pitchFamily="34" charset="0"/>
+                <a:ea typeface="Calibri" panose="020F0502020204030204" pitchFamily="34" charset="0"/>
+                <a:cs typeface="Calibri" panose="020F0502020204030204" pitchFamily="34" charset="0"/>
+              </a:rPr>
               <a:t>Used to save the final answer to a file in the desired format.</a:t>
             </a:r>
           </a:p>
@@ -6328,7 +6384,11 @@
               <a:buFont typeface="Arial" panose="020B0604020202020204" pitchFamily="34" charset="0"/>
               <a:buChar char="•"/>
             </a:pPr>
-            <a:endParaRPr lang="en-GB" sz="1400" dirty="0"/>
+            <a:endParaRPr lang="en-GB" sz="1400" dirty="0">
+              <a:latin typeface="Calibri" panose="020F0502020204030204" pitchFamily="34" charset="0"/>
+              <a:ea typeface="Calibri" panose="020F0502020204030204" pitchFamily="34" charset="0"/>
+              <a:cs typeface="Calibri" panose="020F0502020204030204" pitchFamily="34" charset="0"/>
+            </a:endParaRPr>
           </a:p>
           <a:p>
             <a:pPr marL="285750" indent="-285750">
@@ -6336,15 +6396,27 @@
               <a:buChar char="•"/>
             </a:pPr>
             <a:r>
-              <a:rPr lang="en-GB" sz="1400" b="1" dirty="0" err="1"/>
+              <a:rPr lang="en-GB" sz="1400" b="1" dirty="0" err="1">
+                <a:latin typeface="Calibri" panose="020F0502020204030204" pitchFamily="34" charset="0"/>
+                <a:ea typeface="Calibri" panose="020F0502020204030204" pitchFamily="34" charset="0"/>
+                <a:cs typeface="Calibri" panose="020F0502020204030204" pitchFamily="34" charset="0"/>
+              </a:rPr>
               <a:t>verify_and_log</a:t>
             </a:r>
             <a:r>
-              <a:rPr lang="en-GB" sz="1400" b="1" dirty="0"/>
+              <a:rPr lang="en-GB" sz="1400" b="1" dirty="0">
+                <a:latin typeface="Calibri" panose="020F0502020204030204" pitchFamily="34" charset="0"/>
+                <a:ea typeface="Calibri" panose="020F0502020204030204" pitchFamily="34" charset="0"/>
+                <a:cs typeface="Calibri" panose="020F0502020204030204" pitchFamily="34" charset="0"/>
+              </a:rPr>
               <a:t> (not used): </a:t>
             </a:r>
             <a:r>
-              <a:rPr lang="en-GB" sz="1400" dirty="0"/>
+              <a:rPr lang="en-GB" sz="1400" dirty="0">
+                <a:latin typeface="Calibri" panose="020F0502020204030204" pitchFamily="34" charset="0"/>
+                <a:ea typeface="Calibri" panose="020F0502020204030204" pitchFamily="34" charset="0"/>
+                <a:cs typeface="Calibri" panose="020F0502020204030204" pitchFamily="34" charset="0"/>
+              </a:rPr>
               <a:t>Save the facts that derive from the analysis of the clues and based on that either verify or exclude suspects etc.</a:t>
             </a:r>
           </a:p>
@@ -6353,7 +6425,11 @@
               <a:buFont typeface="Arial" panose="020B0604020202020204" pitchFamily="34" charset="0"/>
               <a:buChar char="•"/>
             </a:pPr>
-            <a:endParaRPr lang="en-GB" sz="1400" dirty="0"/>
+            <a:endParaRPr lang="en-GB" sz="1400" dirty="0">
+              <a:latin typeface="Calibri" panose="020F0502020204030204" pitchFamily="34" charset="0"/>
+              <a:ea typeface="Calibri" panose="020F0502020204030204" pitchFamily="34" charset="0"/>
+              <a:cs typeface="Calibri" panose="020F0502020204030204" pitchFamily="34" charset="0"/>
+            </a:endParaRPr>
           </a:p>
           <a:p>
             <a:pPr marL="285750" indent="-285750">
@@ -6361,15 +6437,27 @@
               <a:buChar char="•"/>
             </a:pPr>
             <a:r>
-              <a:rPr lang="en-GB" sz="1400" b="1" dirty="0" err="1"/>
+              <a:rPr lang="en-GB" sz="1400" b="1" dirty="0" err="1">
+                <a:latin typeface="Calibri" panose="020F0502020204030204" pitchFamily="34" charset="0"/>
+                <a:ea typeface="Calibri" panose="020F0502020204030204" pitchFamily="34" charset="0"/>
+                <a:cs typeface="Calibri" panose="020F0502020204030204" pitchFamily="34" charset="0"/>
+              </a:rPr>
               <a:t>audit_and_finalize_case</a:t>
             </a:r>
             <a:r>
-              <a:rPr lang="en-GB" sz="1400" b="1" dirty="0"/>
+              <a:rPr lang="en-GB" sz="1400" b="1" dirty="0">
+                <a:latin typeface="Calibri" panose="020F0502020204030204" pitchFamily="34" charset="0"/>
+                <a:ea typeface="Calibri" panose="020F0502020204030204" pitchFamily="34" charset="0"/>
+                <a:cs typeface="Calibri" panose="020F0502020204030204" pitchFamily="34" charset="0"/>
+              </a:rPr>
               <a:t> (not used): </a:t>
             </a:r>
             <a:r>
-              <a:rPr lang="en-GB" sz="1400" dirty="0"/>
+              <a:rPr lang="en-GB" sz="1400" dirty="0">
+                <a:latin typeface="Calibri" panose="020F0502020204030204" pitchFamily="34" charset="0"/>
+                <a:ea typeface="Calibri" panose="020F0502020204030204" pitchFamily="34" charset="0"/>
+                <a:cs typeface="Calibri" panose="020F0502020204030204" pitchFamily="34" charset="0"/>
+              </a:rPr>
               <a:t>Save both the answer of the Detective and the Auditor.</a:t>
             </a:r>
           </a:p>
@@ -6652,7 +6740,7 @@
           <p:nvPr>
             <p:extLst>
               <p:ext uri="{D42A27DB-BD31-4B8C-83A1-F6EECF244321}">
-                <p14:modId xmlns:p14="http://schemas.microsoft.com/office/powerpoint/2010/main" val="1065800885"/>
+                <p14:modId xmlns:p14="http://schemas.microsoft.com/office/powerpoint/2010/main" val="35028138"/>
               </p:ext>
             </p:extLst>
           </p:nvPr>
@@ -6725,6 +6813,9 @@
                             <a:schemeClr val="tx1"/>
                           </a:solidFill>
                           <a:effectLst/>
+                          <a:latin typeface="Calibri" panose="020F0502020204030204" pitchFamily="34" charset="0"/>
+                          <a:ea typeface="Calibri" panose="020F0502020204030204" pitchFamily="34" charset="0"/>
+                          <a:cs typeface="Calibri" panose="020F0502020204030204" pitchFamily="34" charset="0"/>
                         </a:rPr>
                         <a:t>case_id</a:t>
                       </a:r>
@@ -6734,6 +6825,8 @@
                         </a:solidFill>
                         <a:effectLst/>
                         <a:latin typeface="Calibri" panose="020F0502020204030204" pitchFamily="34" charset="0"/>
+                        <a:ea typeface="Calibri" panose="020F0502020204030204" pitchFamily="34" charset="0"/>
+                        <a:cs typeface="Calibri" panose="020F0502020204030204" pitchFamily="34" charset="0"/>
                       </a:endParaRPr>
                     </a:p>
                   </a:txBody>
@@ -6766,6 +6859,9 @@
                             <a:schemeClr val="tx1"/>
                           </a:solidFill>
                           <a:effectLst/>
+                          <a:latin typeface="Calibri" panose="020F0502020204030204" pitchFamily="34" charset="0"/>
+                          <a:ea typeface="Calibri" panose="020F0502020204030204" pitchFamily="34" charset="0"/>
+                          <a:cs typeface="Calibri" panose="020F0502020204030204" pitchFamily="34" charset="0"/>
                         </a:rPr>
                         <a:t>best_score</a:t>
                       </a:r>
@@ -6775,6 +6871,146 @@
                         </a:solidFill>
                         <a:effectLst/>
                         <a:latin typeface="Calibri" panose="020F0502020204030204" pitchFamily="34" charset="0"/>
+                        <a:ea typeface="Calibri" panose="020F0502020204030204" pitchFamily="34" charset="0"/>
+                        <a:cs typeface="Calibri" panose="020F0502020204030204" pitchFamily="34" charset="0"/>
+                      </a:endParaRPr>
+                    </a:p>
+                  </a:txBody>
+                  <a:tcPr marL="53433" marR="6361" marT="15267" marB="114499" anchor="b">
+                    <a:lnL w="12700" cmpd="sng">
+                      <a:noFill/>
+                    </a:lnL>
+                    <a:lnR w="12700" cmpd="sng">
+                      <a:noFill/>
+                    </a:lnR>
+                    <a:lnT w="9525" cap="flat" cmpd="sng" algn="ctr">
+                      <a:noFill/>
+                      <a:prstDash val="solid"/>
+                    </a:lnT>
+                    <a:lnB w="38100" cmpd="sng">
+                      <a:noFill/>
+                    </a:lnB>
+                    <a:noFill/>
+                  </a:tcPr>
+                </a:tc>
+                <a:tc>
+                  <a:txBody>
+                    <a:bodyPr/>
+                    <a:lstStyle/>
+                    <a:p>
+                      <a:pPr algn="l" fontAlgn="b"/>
+                      <a:r>
+                        <a:rPr lang="en-US" sz="1300" b="1" u="none" strike="noStrike" cap="none" spc="0" dirty="0" err="1">
+                          <a:solidFill>
+                            <a:schemeClr val="tx1"/>
+                          </a:solidFill>
+                          <a:effectLst/>
+                          <a:latin typeface="Calibri" panose="020F0502020204030204" pitchFamily="34" charset="0"/>
+                          <a:ea typeface="Calibri" panose="020F0502020204030204" pitchFamily="34" charset="0"/>
+                          <a:cs typeface="Calibri" panose="020F0502020204030204" pitchFamily="34" charset="0"/>
+                        </a:rPr>
+                        <a:t>best_accuracy_percent</a:t>
+                      </a:r>
+                      <a:endParaRPr lang="en-US" sz="1300" b="1" i="0" u="none" strike="noStrike" cap="none" spc="0" dirty="0">
+                        <a:solidFill>
+                          <a:schemeClr val="tx1"/>
+                        </a:solidFill>
+                        <a:effectLst/>
+                        <a:latin typeface="Calibri" panose="020F0502020204030204" pitchFamily="34" charset="0"/>
+                        <a:ea typeface="Calibri" panose="020F0502020204030204" pitchFamily="34" charset="0"/>
+                        <a:cs typeface="Calibri" panose="020F0502020204030204" pitchFamily="34" charset="0"/>
+                      </a:endParaRPr>
+                    </a:p>
+                  </a:txBody>
+                  <a:tcPr marL="53433" marR="6361" marT="15267" marB="114499" anchor="b">
+                    <a:lnL w="12700" cmpd="sng">
+                      <a:noFill/>
+                    </a:lnL>
+                    <a:lnR w="12700" cmpd="sng">
+                      <a:noFill/>
+                    </a:lnR>
+                    <a:lnT w="9525" cap="flat" cmpd="sng" algn="ctr">
+                      <a:noFill/>
+                      <a:prstDash val="solid"/>
+                    </a:lnT>
+                    <a:lnB w="38100" cmpd="sng">
+                      <a:noFill/>
+                    </a:lnB>
+                    <a:noFill/>
+                  </a:tcPr>
+                </a:tc>
+                <a:tc>
+                  <a:txBody>
+                    <a:bodyPr/>
+                    <a:lstStyle/>
+                    <a:p>
+                      <a:pPr algn="l" fontAlgn="b"/>
+                      <a:r>
+                        <a:rPr lang="en-US" sz="1300" b="1" u="none" strike="noStrike" cap="none" spc="0" dirty="0" err="1">
+                          <a:solidFill>
+                            <a:schemeClr val="tx1"/>
+                          </a:solidFill>
+                          <a:effectLst/>
+                          <a:latin typeface="Calibri" panose="020F0502020204030204" pitchFamily="34" charset="0"/>
+                          <a:ea typeface="Calibri" panose="020F0502020204030204" pitchFamily="34" charset="0"/>
+                          <a:cs typeface="Calibri" panose="020F0502020204030204" pitchFamily="34" charset="0"/>
+                        </a:rPr>
+                        <a:t>persistent_fails</a:t>
+                      </a:r>
+                      <a:endParaRPr lang="en-US" sz="1300" b="1" i="0" u="none" strike="noStrike" cap="none" spc="0" dirty="0">
+                        <a:solidFill>
+                          <a:schemeClr val="tx1"/>
+                        </a:solidFill>
+                        <a:effectLst/>
+                        <a:latin typeface="Calibri" panose="020F0502020204030204" pitchFamily="34" charset="0"/>
+                        <a:ea typeface="Calibri" panose="020F0502020204030204" pitchFamily="34" charset="0"/>
+                        <a:cs typeface="Calibri" panose="020F0502020204030204" pitchFamily="34" charset="0"/>
+                      </a:endParaRPr>
+                    </a:p>
+                  </a:txBody>
+                  <a:tcPr marL="53433" marR="6361" marT="15267" marB="114499" anchor="b">
+                    <a:lnL w="12700" cmpd="sng">
+                      <a:noFill/>
+                    </a:lnL>
+                    <a:lnR w="12700" cmpd="sng">
+                      <a:noFill/>
+                    </a:lnR>
+                    <a:lnT w="9525" cap="flat" cmpd="sng" algn="ctr">
+                      <a:noFill/>
+                      <a:prstDash val="solid"/>
+                    </a:lnT>
+                    <a:lnB w="38100" cmpd="sng">
+                      <a:noFill/>
+                    </a:lnB>
+                    <a:noFill/>
+                  </a:tcPr>
+                </a:tc>
+                <a:tc>
+                  <a:txBody>
+                    <a:bodyPr/>
+                    <a:lstStyle/>
+                    <a:p>
+                      <a:pPr algn="l" fontAlgn="b"/>
+                      <a:r>
+                        <a:rPr lang="en-US" sz="1300" b="1" u="none" strike="noStrike" cap="none" spc="0" dirty="0" err="1">
+                          <a:solidFill>
+                            <a:schemeClr val="tx1"/>
+                          </a:solidFill>
+                          <a:effectLst/>
+                          <a:latin typeface="Calibri" panose="020F0502020204030204" pitchFamily="34" charset="0"/>
+                          <a:ea typeface="Calibri" panose="020F0502020204030204" pitchFamily="34" charset="0"/>
+                          <a:cs typeface="Calibri" panose="020F0502020204030204" pitchFamily="34" charset="0"/>
+                        </a:rPr>
+                        <a:t>min_score</a:t>
+                      </a:r>
+                      <a:endParaRPr lang="en-US" sz="1300" b="1" i="0" u="none" strike="noStrike" cap="none" spc="0" dirty="0">
+                        <a:solidFill>
+                          <a:schemeClr val="tx1"/>
+                        </a:solidFill>
+                        <a:effectLst/>
+                        <a:latin typeface="Calibri" panose="020F0502020204030204" pitchFamily="34" charset="0"/>
+                        <a:ea typeface="Calibri" panose="020F0502020204030204" pitchFamily="34" charset="0"/>
+                        <a:cs typeface="Calibri" panose="020F0502020204030204" pitchFamily="34" charset="0"/>
                       </a:endParaRPr>
                     </a:p>
                   </a:txBody>
@@ -6807,129 +7043,9 @@
                             <a:schemeClr val="tx1"/>
                           </a:solidFill>
                           <a:effectLst/>
-                        </a:rPr>
-                        <a:t>best_accuracy_percent</a:t>
-                      </a:r>
-                      <a:endParaRPr lang="en-US" sz="1300" b="1" i="0" u="none" strike="noStrike" cap="none" spc="0">
-                        <a:solidFill>
-                          <a:schemeClr val="tx1"/>
-                        </a:solidFill>
-                        <a:effectLst/>
-                        <a:latin typeface="Calibri" panose="020F0502020204030204" pitchFamily="34" charset="0"/>
-                      </a:endParaRPr>
-                    </a:p>
-                  </a:txBody>
-                  <a:tcPr marL="53433" marR="6361" marT="15267" marB="114499" anchor="b">
-                    <a:lnL w="12700" cmpd="sng">
-                      <a:noFill/>
-                    </a:lnL>
-                    <a:lnR w="12700" cmpd="sng">
-                      <a:noFill/>
-                    </a:lnR>
-                    <a:lnT w="9525" cap="flat" cmpd="sng" algn="ctr">
-                      <a:noFill/>
-                      <a:prstDash val="solid"/>
-                    </a:lnT>
-                    <a:lnB w="38100" cmpd="sng">
-                      <a:noFill/>
-                    </a:lnB>
-                    <a:noFill/>
-                  </a:tcPr>
-                </a:tc>
-                <a:tc>
-                  <a:txBody>
-                    <a:bodyPr/>
-                    <a:lstStyle/>
-                    <a:p>
-                      <a:pPr algn="l" fontAlgn="b"/>
-                      <a:r>
-                        <a:rPr lang="en-US" sz="1300" b="1" u="none" strike="noStrike" cap="none" spc="0" dirty="0" err="1">
-                          <a:solidFill>
-                            <a:schemeClr val="tx1"/>
-                          </a:solidFill>
-                          <a:effectLst/>
-                        </a:rPr>
-                        <a:t>persistent_fails</a:t>
-                      </a:r>
-                      <a:endParaRPr lang="en-US" sz="1300" b="1" i="0" u="none" strike="noStrike" cap="none" spc="0" dirty="0">
-                        <a:solidFill>
-                          <a:schemeClr val="tx1"/>
-                        </a:solidFill>
-                        <a:effectLst/>
-                        <a:latin typeface="Calibri" panose="020F0502020204030204" pitchFamily="34" charset="0"/>
-                      </a:endParaRPr>
-                    </a:p>
-                  </a:txBody>
-                  <a:tcPr marL="53433" marR="6361" marT="15267" marB="114499" anchor="b">
-                    <a:lnL w="12700" cmpd="sng">
-                      <a:noFill/>
-                    </a:lnL>
-                    <a:lnR w="12700" cmpd="sng">
-                      <a:noFill/>
-                    </a:lnR>
-                    <a:lnT w="9525" cap="flat" cmpd="sng" algn="ctr">
-                      <a:noFill/>
-                      <a:prstDash val="solid"/>
-                    </a:lnT>
-                    <a:lnB w="38100" cmpd="sng">
-                      <a:noFill/>
-                    </a:lnB>
-                    <a:noFill/>
-                  </a:tcPr>
-                </a:tc>
-                <a:tc>
-                  <a:txBody>
-                    <a:bodyPr/>
-                    <a:lstStyle/>
-                    <a:p>
-                      <a:pPr algn="l" fontAlgn="b"/>
-                      <a:r>
-                        <a:rPr lang="en-US" sz="1300" b="1" u="none" strike="noStrike" cap="none" spc="0" dirty="0" err="1">
-                          <a:solidFill>
-                            <a:schemeClr val="tx1"/>
-                          </a:solidFill>
-                          <a:effectLst/>
-                        </a:rPr>
-                        <a:t>min_score</a:t>
-                      </a:r>
-                      <a:endParaRPr lang="en-US" sz="1300" b="1" i="0" u="none" strike="noStrike" cap="none" spc="0" dirty="0">
-                        <a:solidFill>
-                          <a:schemeClr val="tx1"/>
-                        </a:solidFill>
-                        <a:effectLst/>
-                        <a:latin typeface="Calibri" panose="020F0502020204030204" pitchFamily="34" charset="0"/>
-                      </a:endParaRPr>
-                    </a:p>
-                  </a:txBody>
-                  <a:tcPr marL="53433" marR="6361" marT="15267" marB="114499" anchor="b">
-                    <a:lnL w="12700" cmpd="sng">
-                      <a:noFill/>
-                    </a:lnL>
-                    <a:lnR w="12700" cmpd="sng">
-                      <a:noFill/>
-                    </a:lnR>
-                    <a:lnT w="9525" cap="flat" cmpd="sng" algn="ctr">
-                      <a:noFill/>
-                      <a:prstDash val="solid"/>
-                    </a:lnT>
-                    <a:lnB w="38100" cmpd="sng">
-                      <a:noFill/>
-                    </a:lnB>
-                    <a:noFill/>
-                  </a:tcPr>
-                </a:tc>
-                <a:tc>
-                  <a:txBody>
-                    <a:bodyPr/>
-                    <a:lstStyle/>
-                    <a:p>
-                      <a:pPr algn="l" fontAlgn="b"/>
-                      <a:r>
-                        <a:rPr lang="en-US" sz="1300" b="1" u="none" strike="noStrike" cap="none" spc="0">
-                          <a:solidFill>
-                            <a:schemeClr val="tx1"/>
-                          </a:solidFill>
-                          <a:effectLst/>
+                          <a:latin typeface="Calibri" panose="020F0502020204030204" pitchFamily="34" charset="0"/>
+                          <a:ea typeface="Calibri" panose="020F0502020204030204" pitchFamily="34" charset="0"/>
+                          <a:cs typeface="Calibri" panose="020F0502020204030204" pitchFamily="34" charset="0"/>
                         </a:rPr>
                         <a:t>max_score</a:t>
                       </a:r>
@@ -6939,6 +7055,8 @@
                         </a:solidFill>
                         <a:effectLst/>
                         <a:latin typeface="Calibri" panose="020F0502020204030204" pitchFamily="34" charset="0"/>
+                        <a:ea typeface="Calibri" panose="020F0502020204030204" pitchFamily="34" charset="0"/>
+                        <a:cs typeface="Calibri" panose="020F0502020204030204" pitchFamily="34" charset="0"/>
                       </a:endParaRPr>
                     </a:p>
                   </a:txBody>
@@ -6978,6 +7096,9 @@
                             <a:schemeClr val="tx1"/>
                           </a:solidFill>
                           <a:effectLst/>
+                          <a:latin typeface="Calibri" panose="020F0502020204030204" pitchFamily="34" charset="0"/>
+                          <a:ea typeface="Calibri" panose="020F0502020204030204" pitchFamily="34" charset="0"/>
+                          <a:cs typeface="Calibri" panose="020F0502020204030204" pitchFamily="34" charset="0"/>
                         </a:rPr>
                         <a:t>1052</a:t>
                       </a:r>
@@ -6987,6 +7108,8 @@
                         </a:solidFill>
                         <a:effectLst/>
                         <a:latin typeface="Calibri" panose="020F0502020204030204" pitchFamily="34" charset="0"/>
+                        <a:ea typeface="Calibri" panose="020F0502020204030204" pitchFamily="34" charset="0"/>
+                        <a:cs typeface="Calibri" panose="020F0502020204030204" pitchFamily="34" charset="0"/>
                       </a:endParaRPr>
                     </a:p>
                   </a:txBody>
@@ -7023,6 +7146,9 @@
                             <a:schemeClr val="tx1"/>
                           </a:solidFill>
                           <a:effectLst/>
+                          <a:latin typeface="Calibri" panose="020F0502020204030204" pitchFamily="34" charset="0"/>
+                          <a:ea typeface="Calibri" panose="020F0502020204030204" pitchFamily="34" charset="0"/>
+                          <a:cs typeface="Calibri" panose="020F0502020204030204" pitchFamily="34" charset="0"/>
                         </a:rPr>
                         <a:t>3/7</a:t>
                       </a:r>
@@ -7032,6 +7158,8 @@
                         </a:solidFill>
                         <a:effectLst/>
                         <a:latin typeface="Calibri" panose="020F0502020204030204" pitchFamily="34" charset="0"/>
+                        <a:ea typeface="Calibri" panose="020F0502020204030204" pitchFamily="34" charset="0"/>
+                        <a:cs typeface="Calibri" panose="020F0502020204030204" pitchFamily="34" charset="0"/>
                       </a:endParaRPr>
                     </a:p>
                   </a:txBody>
@@ -7066,6 +7194,9 @@
                             <a:schemeClr val="tx1"/>
                           </a:solidFill>
                           <a:effectLst/>
+                          <a:latin typeface="Calibri" panose="020F0502020204030204" pitchFamily="34" charset="0"/>
+                          <a:ea typeface="Calibri" panose="020F0502020204030204" pitchFamily="34" charset="0"/>
+                          <a:cs typeface="Calibri" panose="020F0502020204030204" pitchFamily="34" charset="0"/>
                         </a:rPr>
                         <a:t>42,86</a:t>
                       </a:r>
@@ -7075,6 +7206,8 @@
                         </a:solidFill>
                         <a:effectLst/>
                         <a:latin typeface="Calibri" panose="020F0502020204030204" pitchFamily="34" charset="0"/>
+                        <a:ea typeface="Calibri" panose="020F0502020204030204" pitchFamily="34" charset="0"/>
+                        <a:cs typeface="Calibri" panose="020F0502020204030204" pitchFamily="34" charset="0"/>
                       </a:endParaRPr>
                     </a:p>
                   </a:txBody>
@@ -7109,6 +7242,9 @@
                             <a:schemeClr val="tx1"/>
                           </a:solidFill>
                           <a:effectLst/>
+                          <a:latin typeface="Calibri" panose="020F0502020204030204" pitchFamily="34" charset="0"/>
+                          <a:ea typeface="Calibri" panose="020F0502020204030204" pitchFamily="34" charset="0"/>
+                          <a:cs typeface="Calibri" panose="020F0502020204030204" pitchFamily="34" charset="0"/>
                         </a:rPr>
                         <a:t>C, D, E</a:t>
                       </a:r>
@@ -7118,6 +7254,8 @@
                         </a:solidFill>
                         <a:effectLst/>
                         <a:latin typeface="Calibri" panose="020F0502020204030204" pitchFamily="34" charset="0"/>
+                        <a:ea typeface="Calibri" panose="020F0502020204030204" pitchFamily="34" charset="0"/>
+                        <a:cs typeface="Calibri" panose="020F0502020204030204" pitchFamily="34" charset="0"/>
                       </a:endParaRPr>
                     </a:p>
                   </a:txBody>
@@ -7152,6 +7290,9 @@
                             <a:schemeClr val="tx1"/>
                           </a:solidFill>
                           <a:effectLst/>
+                          <a:latin typeface="Calibri" panose="020F0502020204030204" pitchFamily="34" charset="0"/>
+                          <a:ea typeface="Calibri" panose="020F0502020204030204" pitchFamily="34" charset="0"/>
+                          <a:cs typeface="Calibri" panose="020F0502020204030204" pitchFamily="34" charset="0"/>
                         </a:rPr>
                         <a:t>2</a:t>
                       </a:r>
@@ -7161,6 +7302,8 @@
                         </a:solidFill>
                         <a:effectLst/>
                         <a:latin typeface="Calibri" panose="020F0502020204030204" pitchFamily="34" charset="0"/>
+                        <a:ea typeface="Calibri" panose="020F0502020204030204" pitchFamily="34" charset="0"/>
+                        <a:cs typeface="Calibri" panose="020F0502020204030204" pitchFamily="34" charset="0"/>
                       </a:endParaRPr>
                     </a:p>
                   </a:txBody>
@@ -7195,6 +7338,9 @@
                             <a:schemeClr val="tx1"/>
                           </a:solidFill>
                           <a:effectLst/>
+                          <a:latin typeface="Calibri" panose="020F0502020204030204" pitchFamily="34" charset="0"/>
+                          <a:ea typeface="Calibri" panose="020F0502020204030204" pitchFamily="34" charset="0"/>
+                          <a:cs typeface="Calibri" panose="020F0502020204030204" pitchFamily="34" charset="0"/>
                         </a:rPr>
                         <a:t>3</a:t>
                       </a:r>
@@ -7204,6 +7350,8 @@
                         </a:solidFill>
                         <a:effectLst/>
                         <a:latin typeface="Calibri" panose="020F0502020204030204" pitchFamily="34" charset="0"/>
+                        <a:ea typeface="Calibri" panose="020F0502020204030204" pitchFamily="34" charset="0"/>
+                        <a:cs typeface="Calibri" panose="020F0502020204030204" pitchFamily="34" charset="0"/>
                       </a:endParaRPr>
                     </a:p>
                   </a:txBody>
@@ -7245,6 +7393,9 @@
                             <a:schemeClr val="tx1"/>
                           </a:solidFill>
                           <a:effectLst/>
+                          <a:latin typeface="Calibri" panose="020F0502020204030204" pitchFamily="34" charset="0"/>
+                          <a:ea typeface="Calibri" panose="020F0502020204030204" pitchFamily="34" charset="0"/>
+                          <a:cs typeface="Calibri" panose="020F0502020204030204" pitchFamily="34" charset="0"/>
                         </a:rPr>
                         <a:t>1182</a:t>
                       </a:r>
@@ -7254,6 +7405,8 @@
                         </a:solidFill>
                         <a:effectLst/>
                         <a:latin typeface="Calibri" panose="020F0502020204030204" pitchFamily="34" charset="0"/>
+                        <a:ea typeface="Calibri" panose="020F0502020204030204" pitchFamily="34" charset="0"/>
+                        <a:cs typeface="Calibri" panose="020F0502020204030204" pitchFamily="34" charset="0"/>
                       </a:endParaRPr>
                     </a:p>
                   </a:txBody>
@@ -7295,6 +7448,9 @@
                             <a:schemeClr val="tx1"/>
                           </a:solidFill>
                           <a:effectLst/>
+                          <a:latin typeface="Calibri" panose="020F0502020204030204" pitchFamily="34" charset="0"/>
+                          <a:ea typeface="Calibri" panose="020F0502020204030204" pitchFamily="34" charset="0"/>
+                          <a:cs typeface="Calibri" panose="020F0502020204030204" pitchFamily="34" charset="0"/>
                         </a:rPr>
                         <a:t>3/6</a:t>
                       </a:r>
@@ -7304,6 +7460,8 @@
                         </a:solidFill>
                         <a:effectLst/>
                         <a:latin typeface="Calibri" panose="020F0502020204030204" pitchFamily="34" charset="0"/>
+                        <a:ea typeface="Calibri" panose="020F0502020204030204" pitchFamily="34" charset="0"/>
+                        <a:cs typeface="Calibri" panose="020F0502020204030204" pitchFamily="34" charset="0"/>
                       </a:endParaRPr>
                     </a:p>
                   </a:txBody>
@@ -7343,6 +7501,9 @@
                             <a:schemeClr val="tx1"/>
                           </a:solidFill>
                           <a:effectLst/>
+                          <a:latin typeface="Calibri" panose="020F0502020204030204" pitchFamily="34" charset="0"/>
+                          <a:ea typeface="Calibri" panose="020F0502020204030204" pitchFamily="34" charset="0"/>
+                          <a:cs typeface="Calibri" panose="020F0502020204030204" pitchFamily="34" charset="0"/>
                         </a:rPr>
                         <a:t>50,00</a:t>
                       </a:r>
@@ -7352,6 +7513,8 @@
                         </a:solidFill>
                         <a:effectLst/>
                         <a:latin typeface="Calibri" panose="020F0502020204030204" pitchFamily="34" charset="0"/>
+                        <a:ea typeface="Calibri" panose="020F0502020204030204" pitchFamily="34" charset="0"/>
+                        <a:cs typeface="Calibri" panose="020F0502020204030204" pitchFamily="34" charset="0"/>
                       </a:endParaRPr>
                     </a:p>
                   </a:txBody>
@@ -7391,6 +7554,9 @@
                             <a:schemeClr val="tx1"/>
                           </a:solidFill>
                           <a:effectLst/>
+                          <a:latin typeface="Calibri" panose="020F0502020204030204" pitchFamily="34" charset="0"/>
+                          <a:ea typeface="Calibri" panose="020F0502020204030204" pitchFamily="34" charset="0"/>
+                          <a:cs typeface="Calibri" panose="020F0502020204030204" pitchFamily="34" charset="0"/>
                         </a:rPr>
                         <a:t>A, D</a:t>
                       </a:r>
@@ -7400,6 +7566,8 @@
                         </a:solidFill>
                         <a:effectLst/>
                         <a:latin typeface="Calibri" panose="020F0502020204030204" pitchFamily="34" charset="0"/>
+                        <a:ea typeface="Calibri" panose="020F0502020204030204" pitchFamily="34" charset="0"/>
+                        <a:cs typeface="Calibri" panose="020F0502020204030204" pitchFamily="34" charset="0"/>
                       </a:endParaRPr>
                     </a:p>
                   </a:txBody>
@@ -7439,6 +7607,9 @@
                             <a:schemeClr val="tx1"/>
                           </a:solidFill>
                           <a:effectLst/>
+                          <a:latin typeface="Calibri" panose="020F0502020204030204" pitchFamily="34" charset="0"/>
+                          <a:ea typeface="Calibri" panose="020F0502020204030204" pitchFamily="34" charset="0"/>
+                          <a:cs typeface="Calibri" panose="020F0502020204030204" pitchFamily="34" charset="0"/>
                         </a:rPr>
                         <a:t>0</a:t>
                       </a:r>
@@ -7448,6 +7619,8 @@
                         </a:solidFill>
                         <a:effectLst/>
                         <a:latin typeface="Calibri" panose="020F0502020204030204" pitchFamily="34" charset="0"/>
+                        <a:ea typeface="Calibri" panose="020F0502020204030204" pitchFamily="34" charset="0"/>
+                        <a:cs typeface="Calibri" panose="020F0502020204030204" pitchFamily="34" charset="0"/>
                       </a:endParaRPr>
                     </a:p>
                   </a:txBody>
@@ -7487,6 +7660,9 @@
                             <a:schemeClr val="tx1"/>
                           </a:solidFill>
                           <a:effectLst/>
+                          <a:latin typeface="Calibri" panose="020F0502020204030204" pitchFamily="34" charset="0"/>
+                          <a:ea typeface="Calibri" panose="020F0502020204030204" pitchFamily="34" charset="0"/>
+                          <a:cs typeface="Calibri" panose="020F0502020204030204" pitchFamily="34" charset="0"/>
                         </a:rPr>
                         <a:t>3</a:t>
                       </a:r>
@@ -7496,6 +7672,8 @@
                         </a:solidFill>
                         <a:effectLst/>
                         <a:latin typeface="Calibri" panose="020F0502020204030204" pitchFamily="34" charset="0"/>
+                        <a:ea typeface="Calibri" panose="020F0502020204030204" pitchFamily="34" charset="0"/>
+                        <a:cs typeface="Calibri" panose="020F0502020204030204" pitchFamily="34" charset="0"/>
                       </a:endParaRPr>
                     </a:p>
                   </a:txBody>
@@ -7542,6 +7720,9 @@
                             <a:schemeClr val="tx1"/>
                           </a:solidFill>
                           <a:effectLst/>
+                          <a:latin typeface="Calibri" panose="020F0502020204030204" pitchFamily="34" charset="0"/>
+                          <a:ea typeface="Calibri" panose="020F0502020204030204" pitchFamily="34" charset="0"/>
+                          <a:cs typeface="Calibri" panose="020F0502020204030204" pitchFamily="34" charset="0"/>
                         </a:rPr>
                         <a:t>1230</a:t>
                       </a:r>
@@ -7551,6 +7732,8 @@
                         </a:solidFill>
                         <a:effectLst/>
                         <a:latin typeface="Calibri" panose="020F0502020204030204" pitchFamily="34" charset="0"/>
+                        <a:ea typeface="Calibri" panose="020F0502020204030204" pitchFamily="34" charset="0"/>
+                        <a:cs typeface="Calibri" panose="020F0502020204030204" pitchFamily="34" charset="0"/>
                       </a:endParaRPr>
                     </a:p>
                   </a:txBody>
@@ -7588,6 +7771,9 @@
                             <a:schemeClr val="tx1"/>
                           </a:solidFill>
                           <a:effectLst/>
+                          <a:latin typeface="Calibri" panose="020F0502020204030204" pitchFamily="34" charset="0"/>
+                          <a:ea typeface="Calibri" panose="020F0502020204030204" pitchFamily="34" charset="0"/>
+                          <a:cs typeface="Calibri" panose="020F0502020204030204" pitchFamily="34" charset="0"/>
                         </a:rPr>
                         <a:t>3/8</a:t>
                       </a:r>
@@ -7597,6 +7783,8 @@
                         </a:solidFill>
                         <a:effectLst/>
                         <a:latin typeface="Calibri" panose="020F0502020204030204" pitchFamily="34" charset="0"/>
+                        <a:ea typeface="Calibri" panose="020F0502020204030204" pitchFamily="34" charset="0"/>
+                        <a:cs typeface="Calibri" panose="020F0502020204030204" pitchFamily="34" charset="0"/>
                       </a:endParaRPr>
                     </a:p>
                   </a:txBody>
@@ -7632,6 +7820,9 @@
                             <a:schemeClr val="tx1"/>
                           </a:solidFill>
                           <a:effectLst/>
+                          <a:latin typeface="Calibri" panose="020F0502020204030204" pitchFamily="34" charset="0"/>
+                          <a:ea typeface="Calibri" panose="020F0502020204030204" pitchFamily="34" charset="0"/>
+                          <a:cs typeface="Calibri" panose="020F0502020204030204" pitchFamily="34" charset="0"/>
                         </a:rPr>
                         <a:t>37,50</a:t>
                       </a:r>
@@ -7641,6 +7832,8 @@
                         </a:solidFill>
                         <a:effectLst/>
                         <a:latin typeface="Calibri" panose="020F0502020204030204" pitchFamily="34" charset="0"/>
+                        <a:ea typeface="Calibri" panose="020F0502020204030204" pitchFamily="34" charset="0"/>
+                        <a:cs typeface="Calibri" panose="020F0502020204030204" pitchFamily="34" charset="0"/>
                       </a:endParaRPr>
                     </a:p>
                   </a:txBody>
@@ -7676,6 +7869,9 @@
                             <a:schemeClr val="tx1"/>
                           </a:solidFill>
                           <a:effectLst/>
+                          <a:latin typeface="Calibri" panose="020F0502020204030204" pitchFamily="34" charset="0"/>
+                          <a:ea typeface="Calibri" panose="020F0502020204030204" pitchFamily="34" charset="0"/>
+                          <a:cs typeface="Calibri" panose="020F0502020204030204" pitchFamily="34" charset="0"/>
                         </a:rPr>
                         <a:t>A, D, E, F</a:t>
                       </a:r>
@@ -7685,6 +7881,8 @@
                         </a:solidFill>
                         <a:effectLst/>
                         <a:latin typeface="Calibri" panose="020F0502020204030204" pitchFamily="34" charset="0"/>
+                        <a:ea typeface="Calibri" panose="020F0502020204030204" pitchFamily="34" charset="0"/>
+                        <a:cs typeface="Calibri" panose="020F0502020204030204" pitchFamily="34" charset="0"/>
                       </a:endParaRPr>
                     </a:p>
                   </a:txBody>
@@ -7720,6 +7918,9 @@
                             <a:schemeClr val="tx1"/>
                           </a:solidFill>
                           <a:effectLst/>
+                          <a:latin typeface="Calibri" panose="020F0502020204030204" pitchFamily="34" charset="0"/>
+                          <a:ea typeface="Calibri" panose="020F0502020204030204" pitchFamily="34" charset="0"/>
+                          <a:cs typeface="Calibri" panose="020F0502020204030204" pitchFamily="34" charset="0"/>
                         </a:rPr>
                         <a:t>0</a:t>
                       </a:r>
@@ -7729,6 +7930,8 @@
                         </a:solidFill>
                         <a:effectLst/>
                         <a:latin typeface="Calibri" panose="020F0502020204030204" pitchFamily="34" charset="0"/>
+                        <a:ea typeface="Calibri" panose="020F0502020204030204" pitchFamily="34" charset="0"/>
+                        <a:cs typeface="Calibri" panose="020F0502020204030204" pitchFamily="34" charset="0"/>
                       </a:endParaRPr>
                     </a:p>
                   </a:txBody>
@@ -7764,6 +7967,9 @@
                             <a:schemeClr val="tx1"/>
                           </a:solidFill>
                           <a:effectLst/>
+                          <a:latin typeface="Calibri" panose="020F0502020204030204" pitchFamily="34" charset="0"/>
+                          <a:ea typeface="Calibri" panose="020F0502020204030204" pitchFamily="34" charset="0"/>
+                          <a:cs typeface="Calibri" panose="020F0502020204030204" pitchFamily="34" charset="0"/>
                         </a:rPr>
                         <a:t>3</a:t>
                       </a:r>
@@ -7773,6 +7979,8 @@
                         </a:solidFill>
                         <a:effectLst/>
                         <a:latin typeface="Calibri" panose="020F0502020204030204" pitchFamily="34" charset="0"/>
+                        <a:ea typeface="Calibri" panose="020F0502020204030204" pitchFamily="34" charset="0"/>
+                        <a:cs typeface="Calibri" panose="020F0502020204030204" pitchFamily="34" charset="0"/>
                       </a:endParaRPr>
                     </a:p>
                   </a:txBody>
@@ -7815,6 +8023,9 @@
                             <a:schemeClr val="tx1"/>
                           </a:solidFill>
                           <a:effectLst/>
+                          <a:latin typeface="Calibri" panose="020F0502020204030204" pitchFamily="34" charset="0"/>
+                          <a:ea typeface="Calibri" panose="020F0502020204030204" pitchFamily="34" charset="0"/>
+                          <a:cs typeface="Calibri" panose="020F0502020204030204" pitchFamily="34" charset="0"/>
                         </a:rPr>
                         <a:t>2145</a:t>
                       </a:r>
@@ -7824,6 +8035,8 @@
                         </a:solidFill>
                         <a:effectLst/>
                         <a:latin typeface="Calibri" panose="020F0502020204030204" pitchFamily="34" charset="0"/>
+                        <a:ea typeface="Calibri" panose="020F0502020204030204" pitchFamily="34" charset="0"/>
+                        <a:cs typeface="Calibri" panose="020F0502020204030204" pitchFamily="34" charset="0"/>
                       </a:endParaRPr>
                     </a:p>
                   </a:txBody>
@@ -7865,6 +8078,9 @@
                             <a:schemeClr val="tx1"/>
                           </a:solidFill>
                           <a:effectLst/>
+                          <a:latin typeface="Calibri" panose="020F0502020204030204" pitchFamily="34" charset="0"/>
+                          <a:ea typeface="Calibri" panose="020F0502020204030204" pitchFamily="34" charset="0"/>
+                          <a:cs typeface="Calibri" panose="020F0502020204030204" pitchFamily="34" charset="0"/>
                         </a:rPr>
                         <a:t>4/8</a:t>
                       </a:r>
@@ -7874,6 +8090,8 @@
                         </a:solidFill>
                         <a:effectLst/>
                         <a:latin typeface="Calibri" panose="020F0502020204030204" pitchFamily="34" charset="0"/>
+                        <a:ea typeface="Calibri" panose="020F0502020204030204" pitchFamily="34" charset="0"/>
+                        <a:cs typeface="Calibri" panose="020F0502020204030204" pitchFamily="34" charset="0"/>
                       </a:endParaRPr>
                     </a:p>
                   </a:txBody>
@@ -7913,6 +8131,9 @@
                             <a:schemeClr val="tx1"/>
                           </a:solidFill>
                           <a:effectLst/>
+                          <a:latin typeface="Calibri" panose="020F0502020204030204" pitchFamily="34" charset="0"/>
+                          <a:ea typeface="Calibri" panose="020F0502020204030204" pitchFamily="34" charset="0"/>
+                          <a:cs typeface="Calibri" panose="020F0502020204030204" pitchFamily="34" charset="0"/>
                         </a:rPr>
                         <a:t>50,00</a:t>
                       </a:r>
@@ -7922,6 +8143,8 @@
                         </a:solidFill>
                         <a:effectLst/>
                         <a:latin typeface="Calibri" panose="020F0502020204030204" pitchFamily="34" charset="0"/>
+                        <a:ea typeface="Calibri" panose="020F0502020204030204" pitchFamily="34" charset="0"/>
+                        <a:cs typeface="Calibri" panose="020F0502020204030204" pitchFamily="34" charset="0"/>
                       </a:endParaRPr>
                     </a:p>
                   </a:txBody>
@@ -7961,6 +8184,9 @@
                             <a:schemeClr val="tx1"/>
                           </a:solidFill>
                           <a:effectLst/>
+                          <a:latin typeface="Calibri" panose="020F0502020204030204" pitchFamily="34" charset="0"/>
+                          <a:ea typeface="Calibri" panose="020F0502020204030204" pitchFamily="34" charset="0"/>
+                          <a:cs typeface="Calibri" panose="020F0502020204030204" pitchFamily="34" charset="0"/>
                         </a:rPr>
                         <a:t>C, D, E, F</a:t>
                       </a:r>
@@ -7970,6 +8196,8 @@
                         </a:solidFill>
                         <a:effectLst/>
                         <a:latin typeface="Calibri" panose="020F0502020204030204" pitchFamily="34" charset="0"/>
+                        <a:ea typeface="Calibri" panose="020F0502020204030204" pitchFamily="34" charset="0"/>
+                        <a:cs typeface="Calibri" panose="020F0502020204030204" pitchFamily="34" charset="0"/>
                       </a:endParaRPr>
                     </a:p>
                   </a:txBody>
@@ -8009,6 +8237,9 @@
                             <a:schemeClr val="tx1"/>
                           </a:solidFill>
                           <a:effectLst/>
+                          <a:latin typeface="Calibri" panose="020F0502020204030204" pitchFamily="34" charset="0"/>
+                          <a:ea typeface="Calibri" panose="020F0502020204030204" pitchFamily="34" charset="0"/>
+                          <a:cs typeface="Calibri" panose="020F0502020204030204" pitchFamily="34" charset="0"/>
                         </a:rPr>
                         <a:t>0</a:t>
                       </a:r>
@@ -8018,6 +8249,8 @@
                         </a:solidFill>
                         <a:effectLst/>
                         <a:latin typeface="Calibri" panose="020F0502020204030204" pitchFamily="34" charset="0"/>
+                        <a:ea typeface="Calibri" panose="020F0502020204030204" pitchFamily="34" charset="0"/>
+                        <a:cs typeface="Calibri" panose="020F0502020204030204" pitchFamily="34" charset="0"/>
                       </a:endParaRPr>
                     </a:p>
                   </a:txBody>
@@ -8057,6 +8290,9 @@
                             <a:schemeClr val="tx1"/>
                           </a:solidFill>
                           <a:effectLst/>
+                          <a:latin typeface="Calibri" panose="020F0502020204030204" pitchFamily="34" charset="0"/>
+                          <a:ea typeface="Calibri" panose="020F0502020204030204" pitchFamily="34" charset="0"/>
+                          <a:cs typeface="Calibri" panose="020F0502020204030204" pitchFamily="34" charset="0"/>
                         </a:rPr>
                         <a:t>4</a:t>
                       </a:r>
@@ -8066,6 +8302,8 @@
                         </a:solidFill>
                         <a:effectLst/>
                         <a:latin typeface="Calibri" panose="020F0502020204030204" pitchFamily="34" charset="0"/>
+                        <a:ea typeface="Calibri" panose="020F0502020204030204" pitchFamily="34" charset="0"/>
+                        <a:cs typeface="Calibri" panose="020F0502020204030204" pitchFamily="34" charset="0"/>
                       </a:endParaRPr>
                     </a:p>
                   </a:txBody>
@@ -8112,6 +8350,9 @@
                             <a:schemeClr val="tx1"/>
                           </a:solidFill>
                           <a:effectLst/>
+                          <a:latin typeface="Calibri" panose="020F0502020204030204" pitchFamily="34" charset="0"/>
+                          <a:ea typeface="Calibri" panose="020F0502020204030204" pitchFamily="34" charset="0"/>
+                          <a:cs typeface="Calibri" panose="020F0502020204030204" pitchFamily="34" charset="0"/>
                         </a:rPr>
                         <a:t>2176</a:t>
                       </a:r>
@@ -8121,6 +8362,8 @@
                         </a:solidFill>
                         <a:effectLst/>
                         <a:latin typeface="Calibri" panose="020F0502020204030204" pitchFamily="34" charset="0"/>
+                        <a:ea typeface="Calibri" panose="020F0502020204030204" pitchFamily="34" charset="0"/>
+                        <a:cs typeface="Calibri" panose="020F0502020204030204" pitchFamily="34" charset="0"/>
                       </a:endParaRPr>
                     </a:p>
                   </a:txBody>
@@ -8158,6 +8401,9 @@
                             <a:schemeClr val="tx1"/>
                           </a:solidFill>
                           <a:effectLst/>
+                          <a:latin typeface="Calibri" panose="020F0502020204030204" pitchFamily="34" charset="0"/>
+                          <a:ea typeface="Calibri" panose="020F0502020204030204" pitchFamily="34" charset="0"/>
+                          <a:cs typeface="Calibri" panose="020F0502020204030204" pitchFamily="34" charset="0"/>
                         </a:rPr>
                         <a:t>2/6</a:t>
                       </a:r>
@@ -8167,6 +8413,8 @@
                         </a:solidFill>
                         <a:effectLst/>
                         <a:latin typeface="Calibri" panose="020F0502020204030204" pitchFamily="34" charset="0"/>
+                        <a:ea typeface="Calibri" panose="020F0502020204030204" pitchFamily="34" charset="0"/>
+                        <a:cs typeface="Calibri" panose="020F0502020204030204" pitchFamily="34" charset="0"/>
                       </a:endParaRPr>
                     </a:p>
                   </a:txBody>
@@ -8202,6 +8450,9 @@
                             <a:schemeClr val="tx1"/>
                           </a:solidFill>
                           <a:effectLst/>
+                          <a:latin typeface="Calibri" panose="020F0502020204030204" pitchFamily="34" charset="0"/>
+                          <a:ea typeface="Calibri" panose="020F0502020204030204" pitchFamily="34" charset="0"/>
+                          <a:cs typeface="Calibri" panose="020F0502020204030204" pitchFamily="34" charset="0"/>
                         </a:rPr>
                         <a:t>33,33</a:t>
                       </a:r>
@@ -8211,6 +8462,8 @@
                         </a:solidFill>
                         <a:effectLst/>
                         <a:latin typeface="Calibri" panose="020F0502020204030204" pitchFamily="34" charset="0"/>
+                        <a:ea typeface="Calibri" panose="020F0502020204030204" pitchFamily="34" charset="0"/>
+                        <a:cs typeface="Calibri" panose="020F0502020204030204" pitchFamily="34" charset="0"/>
                       </a:endParaRPr>
                     </a:p>
                   </a:txBody>
@@ -8246,6 +8499,9 @@
                             <a:schemeClr val="tx1"/>
                           </a:solidFill>
                           <a:effectLst/>
+                          <a:latin typeface="Calibri" panose="020F0502020204030204" pitchFamily="34" charset="0"/>
+                          <a:ea typeface="Calibri" panose="020F0502020204030204" pitchFamily="34" charset="0"/>
+                          <a:cs typeface="Calibri" panose="020F0502020204030204" pitchFamily="34" charset="0"/>
                         </a:rPr>
                         <a:t>A, C, D</a:t>
                       </a:r>
@@ -8255,6 +8511,8 @@
                         </a:solidFill>
                         <a:effectLst/>
                         <a:latin typeface="Calibri" panose="020F0502020204030204" pitchFamily="34" charset="0"/>
+                        <a:ea typeface="Calibri" panose="020F0502020204030204" pitchFamily="34" charset="0"/>
+                        <a:cs typeface="Calibri" panose="020F0502020204030204" pitchFamily="34" charset="0"/>
                       </a:endParaRPr>
                     </a:p>
                   </a:txBody>
@@ -8290,6 +8548,9 @@
                             <a:schemeClr val="tx1"/>
                           </a:solidFill>
                           <a:effectLst/>
+                          <a:latin typeface="Calibri" panose="020F0502020204030204" pitchFamily="34" charset="0"/>
+                          <a:ea typeface="Calibri" panose="020F0502020204030204" pitchFamily="34" charset="0"/>
+                          <a:cs typeface="Calibri" panose="020F0502020204030204" pitchFamily="34" charset="0"/>
                         </a:rPr>
                         <a:t>0</a:t>
                       </a:r>
@@ -8299,6 +8560,8 @@
                         </a:solidFill>
                         <a:effectLst/>
                         <a:latin typeface="Calibri" panose="020F0502020204030204" pitchFamily="34" charset="0"/>
+                        <a:ea typeface="Calibri" panose="020F0502020204030204" pitchFamily="34" charset="0"/>
+                        <a:cs typeface="Calibri" panose="020F0502020204030204" pitchFamily="34" charset="0"/>
                       </a:endParaRPr>
                     </a:p>
                   </a:txBody>
@@ -8334,6 +8597,9 @@
                             <a:schemeClr val="tx1"/>
                           </a:solidFill>
                           <a:effectLst/>
+                          <a:latin typeface="Calibri" panose="020F0502020204030204" pitchFamily="34" charset="0"/>
+                          <a:ea typeface="Calibri" panose="020F0502020204030204" pitchFamily="34" charset="0"/>
+                          <a:cs typeface="Calibri" panose="020F0502020204030204" pitchFamily="34" charset="0"/>
                         </a:rPr>
                         <a:t>2</a:t>
                       </a:r>
@@ -8343,6 +8609,8 @@
                         </a:solidFill>
                         <a:effectLst/>
                         <a:latin typeface="Calibri" panose="020F0502020204030204" pitchFamily="34" charset="0"/>
+                        <a:ea typeface="Calibri" panose="020F0502020204030204" pitchFamily="34" charset="0"/>
+                        <a:cs typeface="Calibri" panose="020F0502020204030204" pitchFamily="34" charset="0"/>
                       </a:endParaRPr>
                     </a:p>
                   </a:txBody>
@@ -8385,6 +8653,9 @@
                             <a:schemeClr val="tx1"/>
                           </a:solidFill>
                           <a:effectLst/>
+                          <a:latin typeface="Calibri" panose="020F0502020204030204" pitchFamily="34" charset="0"/>
+                          <a:ea typeface="Calibri" panose="020F0502020204030204" pitchFamily="34" charset="0"/>
+                          <a:cs typeface="Calibri" panose="020F0502020204030204" pitchFamily="34" charset="0"/>
                         </a:rPr>
                         <a:t>2279</a:t>
                       </a:r>
@@ -8394,6 +8665,8 @@
                         </a:solidFill>
                         <a:effectLst/>
                         <a:latin typeface="Calibri" panose="020F0502020204030204" pitchFamily="34" charset="0"/>
+                        <a:ea typeface="Calibri" panose="020F0502020204030204" pitchFamily="34" charset="0"/>
+                        <a:cs typeface="Calibri" panose="020F0502020204030204" pitchFamily="34" charset="0"/>
                       </a:endParaRPr>
                     </a:p>
                   </a:txBody>
@@ -8435,6 +8708,9 @@
                             <a:schemeClr val="tx1"/>
                           </a:solidFill>
                           <a:effectLst/>
+                          <a:latin typeface="Calibri" panose="020F0502020204030204" pitchFamily="34" charset="0"/>
+                          <a:ea typeface="Calibri" panose="020F0502020204030204" pitchFamily="34" charset="0"/>
+                          <a:cs typeface="Calibri" panose="020F0502020204030204" pitchFamily="34" charset="0"/>
                         </a:rPr>
                         <a:t>3/7</a:t>
                       </a:r>
@@ -8444,6 +8720,8 @@
                         </a:solidFill>
                         <a:effectLst/>
                         <a:latin typeface="Calibri" panose="020F0502020204030204" pitchFamily="34" charset="0"/>
+                        <a:ea typeface="Calibri" panose="020F0502020204030204" pitchFamily="34" charset="0"/>
+                        <a:cs typeface="Calibri" panose="020F0502020204030204" pitchFamily="34" charset="0"/>
                       </a:endParaRPr>
                     </a:p>
                   </a:txBody>
@@ -8483,6 +8761,9 @@
                             <a:schemeClr val="tx1"/>
                           </a:solidFill>
                           <a:effectLst/>
+                          <a:latin typeface="Calibri" panose="020F0502020204030204" pitchFamily="34" charset="0"/>
+                          <a:ea typeface="Calibri" panose="020F0502020204030204" pitchFamily="34" charset="0"/>
+                          <a:cs typeface="Calibri" panose="020F0502020204030204" pitchFamily="34" charset="0"/>
                         </a:rPr>
                         <a:t>42,86</a:t>
                       </a:r>
@@ -8492,6 +8773,8 @@
                         </a:solidFill>
                         <a:effectLst/>
                         <a:latin typeface="Calibri" panose="020F0502020204030204" pitchFamily="34" charset="0"/>
+                        <a:ea typeface="Calibri" panose="020F0502020204030204" pitchFamily="34" charset="0"/>
+                        <a:cs typeface="Calibri" panose="020F0502020204030204" pitchFamily="34" charset="0"/>
                       </a:endParaRPr>
                     </a:p>
                   </a:txBody>
@@ -8531,6 +8814,9 @@
                             <a:schemeClr val="tx1"/>
                           </a:solidFill>
                           <a:effectLst/>
+                          <a:latin typeface="Calibri" panose="020F0502020204030204" pitchFamily="34" charset="0"/>
+                          <a:ea typeface="Calibri" panose="020F0502020204030204" pitchFamily="34" charset="0"/>
+                          <a:cs typeface="Calibri" panose="020F0502020204030204" pitchFamily="34" charset="0"/>
                         </a:rPr>
                         <a:t>B, D</a:t>
                       </a:r>
@@ -8540,6 +8826,8 @@
                         </a:solidFill>
                         <a:effectLst/>
                         <a:latin typeface="Calibri" panose="020F0502020204030204" pitchFamily="34" charset="0"/>
+                        <a:ea typeface="Calibri" panose="020F0502020204030204" pitchFamily="34" charset="0"/>
+                        <a:cs typeface="Calibri" panose="020F0502020204030204" pitchFamily="34" charset="0"/>
                       </a:endParaRPr>
                     </a:p>
                   </a:txBody>
@@ -8579,6 +8867,9 @@
                             <a:schemeClr val="tx1"/>
                           </a:solidFill>
                           <a:effectLst/>
+                          <a:latin typeface="Calibri" panose="020F0502020204030204" pitchFamily="34" charset="0"/>
+                          <a:ea typeface="Calibri" panose="020F0502020204030204" pitchFamily="34" charset="0"/>
+                          <a:cs typeface="Calibri" panose="020F0502020204030204" pitchFamily="34" charset="0"/>
                         </a:rPr>
                         <a:t>1</a:t>
                       </a:r>
@@ -8588,6 +8879,8 @@
                         </a:solidFill>
                         <a:effectLst/>
                         <a:latin typeface="Calibri" panose="020F0502020204030204" pitchFamily="34" charset="0"/>
+                        <a:ea typeface="Calibri" panose="020F0502020204030204" pitchFamily="34" charset="0"/>
+                        <a:cs typeface="Calibri" panose="020F0502020204030204" pitchFamily="34" charset="0"/>
                       </a:endParaRPr>
                     </a:p>
                   </a:txBody>
@@ -8627,6 +8920,9 @@
                             <a:schemeClr val="tx1"/>
                           </a:solidFill>
                           <a:effectLst/>
+                          <a:latin typeface="Calibri" panose="020F0502020204030204" pitchFamily="34" charset="0"/>
+                          <a:ea typeface="Calibri" panose="020F0502020204030204" pitchFamily="34" charset="0"/>
+                          <a:cs typeface="Calibri" panose="020F0502020204030204" pitchFamily="34" charset="0"/>
                         </a:rPr>
                         <a:t>3</a:t>
                       </a:r>
@@ -8636,6 +8932,8 @@
                         </a:solidFill>
                         <a:effectLst/>
                         <a:latin typeface="Calibri" panose="020F0502020204030204" pitchFamily="34" charset="0"/>
+                        <a:ea typeface="Calibri" panose="020F0502020204030204" pitchFamily="34" charset="0"/>
+                        <a:cs typeface="Calibri" panose="020F0502020204030204" pitchFamily="34" charset="0"/>
                       </a:endParaRPr>
                     </a:p>
                   </a:txBody>
@@ -8682,6 +8980,9 @@
                             <a:schemeClr val="tx1"/>
                           </a:solidFill>
                           <a:effectLst/>
+                          <a:latin typeface="Calibri" panose="020F0502020204030204" pitchFamily="34" charset="0"/>
+                          <a:ea typeface="Calibri" panose="020F0502020204030204" pitchFamily="34" charset="0"/>
+                          <a:cs typeface="Calibri" panose="020F0502020204030204" pitchFamily="34" charset="0"/>
                         </a:rPr>
                         <a:t>2372</a:t>
                       </a:r>
@@ -8691,6 +8992,8 @@
                         </a:solidFill>
                         <a:effectLst/>
                         <a:latin typeface="Calibri" panose="020F0502020204030204" pitchFamily="34" charset="0"/>
+                        <a:ea typeface="Calibri" panose="020F0502020204030204" pitchFamily="34" charset="0"/>
+                        <a:cs typeface="Calibri" panose="020F0502020204030204" pitchFamily="34" charset="0"/>
                       </a:endParaRPr>
                     </a:p>
                   </a:txBody>
@@ -8728,6 +9031,9 @@
                             <a:schemeClr val="tx1"/>
                           </a:solidFill>
                           <a:effectLst/>
+                          <a:latin typeface="Calibri" panose="020F0502020204030204" pitchFamily="34" charset="0"/>
+                          <a:ea typeface="Calibri" panose="020F0502020204030204" pitchFamily="34" charset="0"/>
+                          <a:cs typeface="Calibri" panose="020F0502020204030204" pitchFamily="34" charset="0"/>
                         </a:rPr>
                         <a:t>3/8</a:t>
                       </a:r>
@@ -8737,6 +9043,8 @@
                         </a:solidFill>
                         <a:effectLst/>
                         <a:latin typeface="Calibri" panose="020F0502020204030204" pitchFamily="34" charset="0"/>
+                        <a:ea typeface="Calibri" panose="020F0502020204030204" pitchFamily="34" charset="0"/>
+                        <a:cs typeface="Calibri" panose="020F0502020204030204" pitchFamily="34" charset="0"/>
                       </a:endParaRPr>
                     </a:p>
                   </a:txBody>
@@ -8772,6 +9080,9 @@
                             <a:schemeClr val="tx1"/>
                           </a:solidFill>
                           <a:effectLst/>
+                          <a:latin typeface="Calibri" panose="020F0502020204030204" pitchFamily="34" charset="0"/>
+                          <a:ea typeface="Calibri" panose="020F0502020204030204" pitchFamily="34" charset="0"/>
+                          <a:cs typeface="Calibri" panose="020F0502020204030204" pitchFamily="34" charset="0"/>
                         </a:rPr>
                         <a:t>37,50</a:t>
                       </a:r>
@@ -8781,6 +9092,8 @@
                         </a:solidFill>
                         <a:effectLst/>
                         <a:latin typeface="Calibri" panose="020F0502020204030204" pitchFamily="34" charset="0"/>
+                        <a:ea typeface="Calibri" panose="020F0502020204030204" pitchFamily="34" charset="0"/>
+                        <a:cs typeface="Calibri" panose="020F0502020204030204" pitchFamily="34" charset="0"/>
                       </a:endParaRPr>
                     </a:p>
                   </a:txBody>
@@ -8816,6 +9129,9 @@
                             <a:schemeClr val="tx1"/>
                           </a:solidFill>
                           <a:effectLst/>
+                          <a:latin typeface="Calibri" panose="020F0502020204030204" pitchFamily="34" charset="0"/>
+                          <a:ea typeface="Calibri" panose="020F0502020204030204" pitchFamily="34" charset="0"/>
+                          <a:cs typeface="Calibri" panose="020F0502020204030204" pitchFamily="34" charset="0"/>
                         </a:rPr>
                         <a:t>C, F, H</a:t>
                       </a:r>
@@ -8825,6 +9141,8 @@
                         </a:solidFill>
                         <a:effectLst/>
                         <a:latin typeface="Calibri" panose="020F0502020204030204" pitchFamily="34" charset="0"/>
+                        <a:ea typeface="Calibri" panose="020F0502020204030204" pitchFamily="34" charset="0"/>
+                        <a:cs typeface="Calibri" panose="020F0502020204030204" pitchFamily="34" charset="0"/>
                       </a:endParaRPr>
                     </a:p>
                   </a:txBody>
@@ -8860,6 +9178,9 @@
                             <a:schemeClr val="tx1"/>
                           </a:solidFill>
                           <a:effectLst/>
+                          <a:latin typeface="Calibri" panose="020F0502020204030204" pitchFamily="34" charset="0"/>
+                          <a:ea typeface="Calibri" panose="020F0502020204030204" pitchFamily="34" charset="0"/>
+                          <a:cs typeface="Calibri" panose="020F0502020204030204" pitchFamily="34" charset="0"/>
                         </a:rPr>
                         <a:t>0</a:t>
                       </a:r>
@@ -8869,6 +9190,8 @@
                         </a:solidFill>
                         <a:effectLst/>
                         <a:latin typeface="Calibri" panose="020F0502020204030204" pitchFamily="34" charset="0"/>
+                        <a:ea typeface="Calibri" panose="020F0502020204030204" pitchFamily="34" charset="0"/>
+                        <a:cs typeface="Calibri" panose="020F0502020204030204" pitchFamily="34" charset="0"/>
                       </a:endParaRPr>
                     </a:p>
                   </a:txBody>
@@ -8904,6 +9227,9 @@
                             <a:schemeClr val="tx1"/>
                           </a:solidFill>
                           <a:effectLst/>
+                          <a:latin typeface="Calibri" panose="020F0502020204030204" pitchFamily="34" charset="0"/>
+                          <a:ea typeface="Calibri" panose="020F0502020204030204" pitchFamily="34" charset="0"/>
+                          <a:cs typeface="Calibri" panose="020F0502020204030204" pitchFamily="34" charset="0"/>
                         </a:rPr>
                         <a:t>3</a:t>
                       </a:r>
@@ -8913,6 +9239,8 @@
                         </a:solidFill>
                         <a:effectLst/>
                         <a:latin typeface="Calibri" panose="020F0502020204030204" pitchFamily="34" charset="0"/>
+                        <a:ea typeface="Calibri" panose="020F0502020204030204" pitchFamily="34" charset="0"/>
+                        <a:cs typeface="Calibri" panose="020F0502020204030204" pitchFamily="34" charset="0"/>
                       </a:endParaRPr>
                     </a:p>
                   </a:txBody>
@@ -8955,6 +9283,9 @@
                             <a:schemeClr val="tx1"/>
                           </a:solidFill>
                           <a:effectLst/>
+                          <a:latin typeface="Calibri" panose="020F0502020204030204" pitchFamily="34" charset="0"/>
+                          <a:ea typeface="Calibri" panose="020F0502020204030204" pitchFamily="34" charset="0"/>
+                          <a:cs typeface="Calibri" panose="020F0502020204030204" pitchFamily="34" charset="0"/>
                         </a:rPr>
                         <a:t>2680</a:t>
                       </a:r>
@@ -8964,6 +9295,8 @@
                         </a:solidFill>
                         <a:effectLst/>
                         <a:latin typeface="Calibri" panose="020F0502020204030204" pitchFamily="34" charset="0"/>
+                        <a:ea typeface="Calibri" panose="020F0502020204030204" pitchFamily="34" charset="0"/>
+                        <a:cs typeface="Calibri" panose="020F0502020204030204" pitchFamily="34" charset="0"/>
                       </a:endParaRPr>
                     </a:p>
                   </a:txBody>
@@ -9005,6 +9338,9 @@
                             <a:schemeClr val="tx1"/>
                           </a:solidFill>
                           <a:effectLst/>
+                          <a:latin typeface="Calibri" panose="020F0502020204030204" pitchFamily="34" charset="0"/>
+                          <a:ea typeface="Calibri" panose="020F0502020204030204" pitchFamily="34" charset="0"/>
+                          <a:cs typeface="Calibri" panose="020F0502020204030204" pitchFamily="34" charset="0"/>
                         </a:rPr>
                         <a:t>3/7</a:t>
                       </a:r>
@@ -9014,6 +9350,8 @@
                         </a:solidFill>
                         <a:effectLst/>
                         <a:latin typeface="Calibri" panose="020F0502020204030204" pitchFamily="34" charset="0"/>
+                        <a:ea typeface="Calibri" panose="020F0502020204030204" pitchFamily="34" charset="0"/>
+                        <a:cs typeface="Calibri" panose="020F0502020204030204" pitchFamily="34" charset="0"/>
                       </a:endParaRPr>
                     </a:p>
                   </a:txBody>
@@ -9053,6 +9391,9 @@
                             <a:schemeClr val="tx1"/>
                           </a:solidFill>
                           <a:effectLst/>
+                          <a:latin typeface="Calibri" panose="020F0502020204030204" pitchFamily="34" charset="0"/>
+                          <a:ea typeface="Calibri" panose="020F0502020204030204" pitchFamily="34" charset="0"/>
+                          <a:cs typeface="Calibri" panose="020F0502020204030204" pitchFamily="34" charset="0"/>
                         </a:rPr>
                         <a:t>42,86</a:t>
                       </a:r>
@@ -9062,6 +9403,8 @@
                         </a:solidFill>
                         <a:effectLst/>
                         <a:latin typeface="Calibri" panose="020F0502020204030204" pitchFamily="34" charset="0"/>
+                        <a:ea typeface="Calibri" panose="020F0502020204030204" pitchFamily="34" charset="0"/>
+                        <a:cs typeface="Calibri" panose="020F0502020204030204" pitchFamily="34" charset="0"/>
                       </a:endParaRPr>
                     </a:p>
                   </a:txBody>
@@ -9101,6 +9444,9 @@
                             <a:schemeClr val="tx1"/>
                           </a:solidFill>
                           <a:effectLst/>
+                          <a:latin typeface="Calibri" panose="020F0502020204030204" pitchFamily="34" charset="0"/>
+                          <a:ea typeface="Calibri" panose="020F0502020204030204" pitchFamily="34" charset="0"/>
+                          <a:cs typeface="Calibri" panose="020F0502020204030204" pitchFamily="34" charset="0"/>
                         </a:rPr>
                         <a:t>None</a:t>
                       </a:r>
@@ -9110,6 +9456,8 @@
                         </a:solidFill>
                         <a:effectLst/>
                         <a:latin typeface="Calibri" panose="020F0502020204030204" pitchFamily="34" charset="0"/>
+                        <a:ea typeface="Calibri" panose="020F0502020204030204" pitchFamily="34" charset="0"/>
+                        <a:cs typeface="Calibri" panose="020F0502020204030204" pitchFamily="34" charset="0"/>
                       </a:endParaRPr>
                     </a:p>
                   </a:txBody>
@@ -9149,6 +9497,9 @@
                             <a:schemeClr val="tx1"/>
                           </a:solidFill>
                           <a:effectLst/>
+                          <a:latin typeface="Calibri" panose="020F0502020204030204" pitchFamily="34" charset="0"/>
+                          <a:ea typeface="Calibri" panose="020F0502020204030204" pitchFamily="34" charset="0"/>
+                          <a:cs typeface="Calibri" panose="020F0502020204030204" pitchFamily="34" charset="0"/>
                         </a:rPr>
                         <a:t>0</a:t>
                       </a:r>
@@ -9158,6 +9509,8 @@
                         </a:solidFill>
                         <a:effectLst/>
                         <a:latin typeface="Calibri" panose="020F0502020204030204" pitchFamily="34" charset="0"/>
+                        <a:ea typeface="Calibri" panose="020F0502020204030204" pitchFamily="34" charset="0"/>
+                        <a:cs typeface="Calibri" panose="020F0502020204030204" pitchFamily="34" charset="0"/>
                       </a:endParaRPr>
                     </a:p>
                   </a:txBody>
@@ -9197,6 +9550,9 @@
                             <a:schemeClr val="tx1"/>
                           </a:solidFill>
                           <a:effectLst/>
+                          <a:latin typeface="Calibri" panose="020F0502020204030204" pitchFamily="34" charset="0"/>
+                          <a:ea typeface="Calibri" panose="020F0502020204030204" pitchFamily="34" charset="0"/>
+                          <a:cs typeface="Calibri" panose="020F0502020204030204" pitchFamily="34" charset="0"/>
                         </a:rPr>
                         <a:t>3</a:t>
                       </a:r>
@@ -9206,6 +9562,8 @@
                         </a:solidFill>
                         <a:effectLst/>
                         <a:latin typeface="Calibri" panose="020F0502020204030204" pitchFamily="34" charset="0"/>
+                        <a:ea typeface="Calibri" panose="020F0502020204030204" pitchFamily="34" charset="0"/>
+                        <a:cs typeface="Calibri" panose="020F0502020204030204" pitchFamily="34" charset="0"/>
                       </a:endParaRPr>
                     </a:p>
                   </a:txBody>
@@ -9252,6 +9610,9 @@
                             <a:schemeClr val="tx1"/>
                           </a:solidFill>
                           <a:effectLst/>
+                          <a:latin typeface="Calibri" panose="020F0502020204030204" pitchFamily="34" charset="0"/>
+                          <a:ea typeface="Calibri" panose="020F0502020204030204" pitchFamily="34" charset="0"/>
+                          <a:cs typeface="Calibri" panose="020F0502020204030204" pitchFamily="34" charset="0"/>
                         </a:rPr>
                         <a:t>2799</a:t>
                       </a:r>
@@ -9261,6 +9622,8 @@
                         </a:solidFill>
                         <a:effectLst/>
                         <a:latin typeface="Calibri" panose="020F0502020204030204" pitchFamily="34" charset="0"/>
+                        <a:ea typeface="Calibri" panose="020F0502020204030204" pitchFamily="34" charset="0"/>
+                        <a:cs typeface="Calibri" panose="020F0502020204030204" pitchFamily="34" charset="0"/>
                       </a:endParaRPr>
                     </a:p>
                   </a:txBody>
@@ -9298,6 +9661,9 @@
                             <a:schemeClr val="tx1"/>
                           </a:solidFill>
                           <a:effectLst/>
+                          <a:latin typeface="Calibri" panose="020F0502020204030204" pitchFamily="34" charset="0"/>
+                          <a:ea typeface="Calibri" panose="020F0502020204030204" pitchFamily="34" charset="0"/>
+                          <a:cs typeface="Calibri" panose="020F0502020204030204" pitchFamily="34" charset="0"/>
                         </a:rPr>
                         <a:t>4/6</a:t>
                       </a:r>
@@ -9307,6 +9673,8 @@
                         </a:solidFill>
                         <a:effectLst/>
                         <a:latin typeface="Calibri" panose="020F0502020204030204" pitchFamily="34" charset="0"/>
+                        <a:ea typeface="Calibri" panose="020F0502020204030204" pitchFamily="34" charset="0"/>
+                        <a:cs typeface="Calibri" panose="020F0502020204030204" pitchFamily="34" charset="0"/>
                       </a:endParaRPr>
                     </a:p>
                   </a:txBody>
@@ -9342,6 +9710,9 @@
                             <a:schemeClr val="tx1"/>
                           </a:solidFill>
                           <a:effectLst/>
+                          <a:latin typeface="Calibri" panose="020F0502020204030204" pitchFamily="34" charset="0"/>
+                          <a:ea typeface="Calibri" panose="020F0502020204030204" pitchFamily="34" charset="0"/>
+                          <a:cs typeface="Calibri" panose="020F0502020204030204" pitchFamily="34" charset="0"/>
                         </a:rPr>
                         <a:t>66,67</a:t>
                       </a:r>
@@ -9351,6 +9722,8 @@
                         </a:solidFill>
                         <a:effectLst/>
                         <a:latin typeface="Calibri" panose="020F0502020204030204" pitchFamily="34" charset="0"/>
+                        <a:ea typeface="Calibri" panose="020F0502020204030204" pitchFamily="34" charset="0"/>
+                        <a:cs typeface="Calibri" panose="020F0502020204030204" pitchFamily="34" charset="0"/>
                       </a:endParaRPr>
                     </a:p>
                   </a:txBody>
@@ -9386,6 +9759,9 @@
                             <a:schemeClr val="tx1"/>
                           </a:solidFill>
                           <a:effectLst/>
+                          <a:latin typeface="Calibri" panose="020F0502020204030204" pitchFamily="34" charset="0"/>
+                          <a:ea typeface="Calibri" panose="020F0502020204030204" pitchFamily="34" charset="0"/>
+                          <a:cs typeface="Calibri" panose="020F0502020204030204" pitchFamily="34" charset="0"/>
                         </a:rPr>
                         <a:t>None</a:t>
                       </a:r>
@@ -9395,6 +9771,8 @@
                         </a:solidFill>
                         <a:effectLst/>
                         <a:latin typeface="Calibri" panose="020F0502020204030204" pitchFamily="34" charset="0"/>
+                        <a:ea typeface="Calibri" panose="020F0502020204030204" pitchFamily="34" charset="0"/>
+                        <a:cs typeface="Calibri" panose="020F0502020204030204" pitchFamily="34" charset="0"/>
                       </a:endParaRPr>
                     </a:p>
                   </a:txBody>
@@ -9430,6 +9808,9 @@
                             <a:schemeClr val="tx1"/>
                           </a:solidFill>
                           <a:effectLst/>
+                          <a:latin typeface="Calibri" panose="020F0502020204030204" pitchFamily="34" charset="0"/>
+                          <a:ea typeface="Calibri" panose="020F0502020204030204" pitchFamily="34" charset="0"/>
+                          <a:cs typeface="Calibri" panose="020F0502020204030204" pitchFamily="34" charset="0"/>
                         </a:rPr>
                         <a:t>1</a:t>
                       </a:r>
@@ -9439,6 +9820,8 @@
                         </a:solidFill>
                         <a:effectLst/>
                         <a:latin typeface="Calibri" panose="020F0502020204030204" pitchFamily="34" charset="0"/>
+                        <a:ea typeface="Calibri" panose="020F0502020204030204" pitchFamily="34" charset="0"/>
+                        <a:cs typeface="Calibri" panose="020F0502020204030204" pitchFamily="34" charset="0"/>
                       </a:endParaRPr>
                     </a:p>
                   </a:txBody>
@@ -9474,6 +9857,9 @@
                             <a:schemeClr val="tx1"/>
                           </a:solidFill>
                           <a:effectLst/>
+                          <a:latin typeface="Calibri" panose="020F0502020204030204" pitchFamily="34" charset="0"/>
+                          <a:ea typeface="Calibri" panose="020F0502020204030204" pitchFamily="34" charset="0"/>
+                          <a:cs typeface="Calibri" panose="020F0502020204030204" pitchFamily="34" charset="0"/>
                         </a:rPr>
                         <a:t>4</a:t>
                       </a:r>
@@ -9483,6 +9869,8 @@
                         </a:solidFill>
                         <a:effectLst/>
                         <a:latin typeface="Calibri" panose="020F0502020204030204" pitchFamily="34" charset="0"/>
+                        <a:ea typeface="Calibri" panose="020F0502020204030204" pitchFamily="34" charset="0"/>
+                        <a:cs typeface="Calibri" panose="020F0502020204030204" pitchFamily="34" charset="0"/>
                       </a:endParaRPr>
                     </a:p>
                   </a:txBody>
@@ -9525,6 +9913,9 @@
                             <a:schemeClr val="tx1"/>
                           </a:solidFill>
                           <a:effectLst/>
+                          <a:latin typeface="Calibri" panose="020F0502020204030204" pitchFamily="34" charset="0"/>
+                          <a:ea typeface="Calibri" panose="020F0502020204030204" pitchFamily="34" charset="0"/>
+                          <a:cs typeface="Calibri" panose="020F0502020204030204" pitchFamily="34" charset="0"/>
                         </a:rPr>
                         <a:t>2973</a:t>
                       </a:r>
@@ -9534,6 +9925,8 @@
                         </a:solidFill>
                         <a:effectLst/>
                         <a:latin typeface="Calibri" panose="020F0502020204030204" pitchFamily="34" charset="0"/>
+                        <a:ea typeface="Calibri" panose="020F0502020204030204" pitchFamily="34" charset="0"/>
+                        <a:cs typeface="Calibri" panose="020F0502020204030204" pitchFamily="34" charset="0"/>
                       </a:endParaRPr>
                     </a:p>
                   </a:txBody>
@@ -9575,6 +9968,9 @@
                             <a:schemeClr val="tx1"/>
                           </a:solidFill>
                           <a:effectLst/>
+                          <a:latin typeface="Calibri" panose="020F0502020204030204" pitchFamily="34" charset="0"/>
+                          <a:ea typeface="Calibri" panose="020F0502020204030204" pitchFamily="34" charset="0"/>
+                          <a:cs typeface="Calibri" panose="020F0502020204030204" pitchFamily="34" charset="0"/>
                         </a:rPr>
                         <a:t>4/8</a:t>
                       </a:r>
@@ -9584,6 +9980,8 @@
                         </a:solidFill>
                         <a:effectLst/>
                         <a:latin typeface="Calibri" panose="020F0502020204030204" pitchFamily="34" charset="0"/>
+                        <a:ea typeface="Calibri" panose="020F0502020204030204" pitchFamily="34" charset="0"/>
+                        <a:cs typeface="Calibri" panose="020F0502020204030204" pitchFamily="34" charset="0"/>
                       </a:endParaRPr>
                     </a:p>
                   </a:txBody>
@@ -9623,6 +10021,9 @@
                             <a:schemeClr val="tx1"/>
                           </a:solidFill>
                           <a:effectLst/>
+                          <a:latin typeface="Calibri" panose="020F0502020204030204" pitchFamily="34" charset="0"/>
+                          <a:ea typeface="Calibri" panose="020F0502020204030204" pitchFamily="34" charset="0"/>
+                          <a:cs typeface="Calibri" panose="020F0502020204030204" pitchFamily="34" charset="0"/>
                         </a:rPr>
                         <a:t>50,00</a:t>
                       </a:r>
@@ -9632,6 +10033,8 @@
                         </a:solidFill>
                         <a:effectLst/>
                         <a:latin typeface="Calibri" panose="020F0502020204030204" pitchFamily="34" charset="0"/>
+                        <a:ea typeface="Calibri" panose="020F0502020204030204" pitchFamily="34" charset="0"/>
+                        <a:cs typeface="Calibri" panose="020F0502020204030204" pitchFamily="34" charset="0"/>
                       </a:endParaRPr>
                     </a:p>
                   </a:txBody>
@@ -9671,6 +10074,9 @@
                             <a:schemeClr val="tx1"/>
                           </a:solidFill>
                           <a:effectLst/>
+                          <a:latin typeface="Calibri" panose="020F0502020204030204" pitchFamily="34" charset="0"/>
+                          <a:ea typeface="Calibri" panose="020F0502020204030204" pitchFamily="34" charset="0"/>
+                          <a:cs typeface="Calibri" panose="020F0502020204030204" pitchFamily="34" charset="0"/>
                         </a:rPr>
                         <a:t>C, F</a:t>
                       </a:r>
@@ -9680,6 +10086,8 @@
                         </a:solidFill>
                         <a:effectLst/>
                         <a:latin typeface="Calibri" panose="020F0502020204030204" pitchFamily="34" charset="0"/>
+                        <a:ea typeface="Calibri" panose="020F0502020204030204" pitchFamily="34" charset="0"/>
+                        <a:cs typeface="Calibri" panose="020F0502020204030204" pitchFamily="34" charset="0"/>
                       </a:endParaRPr>
                     </a:p>
                   </a:txBody>
@@ -9719,6 +10127,9 @@
                             <a:schemeClr val="tx1"/>
                           </a:solidFill>
                           <a:effectLst/>
+                          <a:latin typeface="Calibri" panose="020F0502020204030204" pitchFamily="34" charset="0"/>
+                          <a:ea typeface="Calibri" panose="020F0502020204030204" pitchFamily="34" charset="0"/>
+                          <a:cs typeface="Calibri" panose="020F0502020204030204" pitchFamily="34" charset="0"/>
                         </a:rPr>
                         <a:t>0</a:t>
                       </a:r>
@@ -9728,6 +10139,8 @@
                         </a:solidFill>
                         <a:effectLst/>
                         <a:latin typeface="Calibri" panose="020F0502020204030204" pitchFamily="34" charset="0"/>
+                        <a:ea typeface="Calibri" panose="020F0502020204030204" pitchFamily="34" charset="0"/>
+                        <a:cs typeface="Calibri" panose="020F0502020204030204" pitchFamily="34" charset="0"/>
                       </a:endParaRPr>
                     </a:p>
                   </a:txBody>
@@ -9767,6 +10180,9 @@
                             <a:schemeClr val="tx1"/>
                           </a:solidFill>
                           <a:effectLst/>
+                          <a:latin typeface="Calibri" panose="020F0502020204030204" pitchFamily="34" charset="0"/>
+                          <a:ea typeface="Calibri" panose="020F0502020204030204" pitchFamily="34" charset="0"/>
+                          <a:cs typeface="Calibri" panose="020F0502020204030204" pitchFamily="34" charset="0"/>
                         </a:rPr>
                         <a:t>4</a:t>
                       </a:r>
@@ -9776,6 +10192,8 @@
                         </a:solidFill>
                         <a:effectLst/>
                         <a:latin typeface="Calibri" panose="020F0502020204030204" pitchFamily="34" charset="0"/>
+                        <a:ea typeface="Calibri" panose="020F0502020204030204" pitchFamily="34" charset="0"/>
+                        <a:cs typeface="Calibri" panose="020F0502020204030204" pitchFamily="34" charset="0"/>
                       </a:endParaRPr>
                     </a:p>
                   </a:txBody>
@@ -9828,7 +10246,7 @@
           <p:nvPr>
             <p:extLst>
               <p:ext uri="{D42A27DB-BD31-4B8C-83A1-F6EECF244321}">
-                <p14:modId xmlns:p14="http://schemas.microsoft.com/office/powerpoint/2010/main" val="3026092848"/>
+                <p14:modId xmlns:p14="http://schemas.microsoft.com/office/powerpoint/2010/main" val="1936856826"/>
               </p:ext>
             </p:extLst>
           </p:nvPr>
@@ -9873,6 +10291,9 @@
                             <a:schemeClr val="tx1"/>
                           </a:solidFill>
                           <a:effectLst/>
+                          <a:latin typeface="Calibri" panose="020F0502020204030204" pitchFamily="34" charset="0"/>
+                          <a:ea typeface="Calibri" panose="020F0502020204030204" pitchFamily="34" charset="0"/>
+                          <a:cs typeface="Calibri" panose="020F0502020204030204" pitchFamily="34" charset="0"/>
                         </a:rPr>
                         <a:t>Question</a:t>
                       </a:r>
@@ -9882,6 +10303,8 @@
                         </a:solidFill>
                         <a:effectLst/>
                         <a:latin typeface="Calibri" panose="020F0502020204030204" pitchFamily="34" charset="0"/>
+                        <a:ea typeface="Calibri" panose="020F0502020204030204" pitchFamily="34" charset="0"/>
+                        <a:cs typeface="Calibri" panose="020F0502020204030204" pitchFamily="34" charset="0"/>
                       </a:endParaRPr>
                     </a:p>
                   </a:txBody>
@@ -9915,6 +10338,8 @@
                           </a:solidFill>
                           <a:effectLst/>
                           <a:latin typeface="Calibri" panose="020F0502020204030204" pitchFamily="34" charset="0"/>
+                          <a:ea typeface="Calibri" panose="020F0502020204030204" pitchFamily="34" charset="0"/>
+                          <a:cs typeface="Calibri" panose="020F0502020204030204" pitchFamily="34" charset="0"/>
                         </a:rPr>
                         <a:t>Correct Results</a:t>
                       </a:r>
@@ -9956,6 +10381,9 @@
                             <a:schemeClr val="tx1"/>
                           </a:solidFill>
                           <a:effectLst/>
+                          <a:latin typeface="Calibri" panose="020F0502020204030204" pitchFamily="34" charset="0"/>
+                          <a:ea typeface="Calibri" panose="020F0502020204030204" pitchFamily="34" charset="0"/>
+                          <a:cs typeface="Calibri" panose="020F0502020204030204" pitchFamily="34" charset="0"/>
                         </a:rPr>
                         <a:t>A (SUSPECT)</a:t>
                       </a:r>
@@ -9965,6 +10393,8 @@
                         </a:solidFill>
                         <a:effectLst/>
                         <a:latin typeface="Calibri" panose="020F0502020204030204" pitchFamily="34" charset="0"/>
+                        <a:ea typeface="Calibri" panose="020F0502020204030204" pitchFamily="34" charset="0"/>
+                        <a:cs typeface="Calibri" panose="020F0502020204030204" pitchFamily="34" charset="0"/>
                       </a:endParaRPr>
                     </a:p>
                   </a:txBody>
@@ -10002,6 +10432,8 @@
                           </a:solidFill>
                           <a:effectLst/>
                           <a:latin typeface="Calibri" panose="020F0502020204030204" pitchFamily="34" charset="0"/>
+                          <a:ea typeface="Calibri" panose="020F0502020204030204" pitchFamily="34" charset="0"/>
+                          <a:cs typeface="Calibri" panose="020F0502020204030204" pitchFamily="34" charset="0"/>
                         </a:rPr>
                         <a:t>7/10</a:t>
                       </a:r>
@@ -10045,6 +10477,9 @@
                             <a:schemeClr val="tx1"/>
                           </a:solidFill>
                           <a:effectLst/>
+                          <a:latin typeface="Calibri" panose="020F0502020204030204" pitchFamily="34" charset="0"/>
+                          <a:ea typeface="Calibri" panose="020F0502020204030204" pitchFamily="34" charset="0"/>
+                          <a:cs typeface="Calibri" panose="020F0502020204030204" pitchFamily="34" charset="0"/>
                         </a:rPr>
                         <a:t>B (WEAPON)</a:t>
                       </a:r>
@@ -10054,6 +10489,8 @@
                         </a:solidFill>
                         <a:effectLst/>
                         <a:latin typeface="Calibri" panose="020F0502020204030204" pitchFamily="34" charset="0"/>
+                        <a:ea typeface="Calibri" panose="020F0502020204030204" pitchFamily="34" charset="0"/>
+                        <a:cs typeface="Calibri" panose="020F0502020204030204" pitchFamily="34" charset="0"/>
                       </a:endParaRPr>
                     </a:p>
                   </a:txBody>
@@ -10096,6 +10533,8 @@
                           </a:solidFill>
                           <a:effectLst/>
                           <a:latin typeface="Calibri" panose="020F0502020204030204" pitchFamily="34" charset="0"/>
+                          <a:ea typeface="Calibri" panose="020F0502020204030204" pitchFamily="34" charset="0"/>
+                          <a:cs typeface="Calibri" panose="020F0502020204030204" pitchFamily="34" charset="0"/>
                         </a:rPr>
                         <a:t>5/6</a:t>
                       </a:r>
@@ -10144,6 +10583,9 @@
                             <a:schemeClr val="tx1"/>
                           </a:solidFill>
                           <a:effectLst/>
+                          <a:latin typeface="Calibri" panose="020F0502020204030204" pitchFamily="34" charset="0"/>
+                          <a:ea typeface="Calibri" panose="020F0502020204030204" pitchFamily="34" charset="0"/>
+                          <a:cs typeface="Calibri" panose="020F0502020204030204" pitchFamily="34" charset="0"/>
                         </a:rPr>
                         <a:t>C (MURDER ROOM)</a:t>
                       </a:r>
@@ -10153,6 +10595,8 @@
                         </a:solidFill>
                         <a:effectLst/>
                         <a:latin typeface="Calibri" panose="020F0502020204030204" pitchFamily="34" charset="0"/>
+                        <a:ea typeface="Calibri" panose="020F0502020204030204" pitchFamily="34" charset="0"/>
+                        <a:cs typeface="Calibri" panose="020F0502020204030204" pitchFamily="34" charset="0"/>
                       </a:endParaRPr>
                     </a:p>
                   </a:txBody>
@@ -10191,6 +10635,8 @@
                           </a:solidFill>
                           <a:effectLst/>
                           <a:latin typeface="Calibri" panose="020F0502020204030204" pitchFamily="34" charset="0"/>
+                          <a:ea typeface="Calibri" panose="020F0502020204030204" pitchFamily="34" charset="0"/>
+                          <a:cs typeface="Calibri" panose="020F0502020204030204" pitchFamily="34" charset="0"/>
                         </a:rPr>
                         <a:t>6/10</a:t>
                       </a:r>
@@ -10235,6 +10681,9 @@
                             <a:schemeClr val="tx1"/>
                           </a:solidFill>
                           <a:effectLst/>
+                          <a:latin typeface="Calibri" panose="020F0502020204030204" pitchFamily="34" charset="0"/>
+                          <a:ea typeface="Calibri" panose="020F0502020204030204" pitchFamily="34" charset="0"/>
+                          <a:cs typeface="Calibri" panose="020F0502020204030204" pitchFamily="34" charset="0"/>
                         </a:rPr>
                         <a:t>D (TIME)</a:t>
                       </a:r>
@@ -10244,6 +10693,8 @@
                         </a:solidFill>
                         <a:effectLst/>
                         <a:latin typeface="Calibri" panose="020F0502020204030204" pitchFamily="34" charset="0"/>
+                        <a:ea typeface="Calibri" panose="020F0502020204030204" pitchFamily="34" charset="0"/>
+                        <a:cs typeface="Calibri" panose="020F0502020204030204" pitchFamily="34" charset="0"/>
                       </a:endParaRPr>
                     </a:p>
                   </a:txBody>
@@ -10286,6 +10737,8 @@
                           </a:solidFill>
                           <a:effectLst/>
                           <a:latin typeface="Calibri" panose="020F0502020204030204" pitchFamily="34" charset="0"/>
+                          <a:ea typeface="Calibri" panose="020F0502020204030204" pitchFamily="34" charset="0"/>
+                          <a:cs typeface="Calibri" panose="020F0502020204030204" pitchFamily="34" charset="0"/>
                         </a:rPr>
                         <a:t>4/7</a:t>
                       </a:r>
@@ -10334,6 +10787,9 @@
                             <a:schemeClr val="tx1"/>
                           </a:solidFill>
                           <a:effectLst/>
+                          <a:latin typeface="Calibri" panose="020F0502020204030204" pitchFamily="34" charset="0"/>
+                          <a:ea typeface="Calibri" panose="020F0502020204030204" pitchFamily="34" charset="0"/>
+                          <a:cs typeface="Calibri" panose="020F0502020204030204" pitchFamily="34" charset="0"/>
                         </a:rPr>
                         <a:t>E (MOTIVE)</a:t>
                       </a:r>
@@ -10343,6 +10799,8 @@
                         </a:solidFill>
                         <a:effectLst/>
                         <a:latin typeface="Calibri" panose="020F0502020204030204" pitchFamily="34" charset="0"/>
+                        <a:ea typeface="Calibri" panose="020F0502020204030204" pitchFamily="34" charset="0"/>
+                        <a:cs typeface="Calibri" panose="020F0502020204030204" pitchFamily="34" charset="0"/>
                       </a:endParaRPr>
                     </a:p>
                   </a:txBody>
@@ -10381,6 +10839,8 @@
                           </a:solidFill>
                           <a:effectLst/>
                           <a:latin typeface="Calibri" panose="020F0502020204030204" pitchFamily="34" charset="0"/>
+                          <a:ea typeface="Calibri" panose="020F0502020204030204" pitchFamily="34" charset="0"/>
+                          <a:cs typeface="Calibri" panose="020F0502020204030204" pitchFamily="34" charset="0"/>
                         </a:rPr>
                         <a:t>4/10</a:t>
                       </a:r>
@@ -10530,7 +10990,7 @@
         <p:spPr>
           <a:xfrm>
             <a:off x="521208" y="750098"/>
-            <a:ext cx="2523448" cy="584775"/>
+            <a:ext cx="9635843" cy="3046988"/>
           </a:xfrm>
           <a:prstGeom prst="rect">
             <a:avLst/>
@@ -10579,6 +11039,188 @@
               </a:rPr>
               <a:t>hat worked and what not</a:t>
             </a:r>
+          </a:p>
+          <a:p>
+            <a:endParaRPr lang="en-GB" sz="1600" b="1" dirty="0">
+              <a:latin typeface="Calibri" panose="020F0502020204030204" pitchFamily="34" charset="0"/>
+              <a:ea typeface="Calibri" panose="020F0502020204030204" pitchFamily="34" charset="0"/>
+              <a:cs typeface="Calibri" panose="020F0502020204030204" pitchFamily="34" charset="0"/>
+            </a:endParaRPr>
+          </a:p>
+          <a:p>
+            <a:pPr marL="285750" indent="-285750">
+              <a:buFont typeface="Arial" panose="020B0604020202020204" pitchFamily="34" charset="0"/>
+              <a:buChar char="•"/>
+            </a:pPr>
+            <a:r>
+              <a:rPr lang="en-GB" sz="1600" dirty="0">
+                <a:effectLst/>
+                <a:latin typeface="Calibri" panose="020F0502020204030204" pitchFamily="34" charset="0"/>
+                <a:ea typeface="Calibri" panose="020F0502020204030204" pitchFamily="34" charset="0"/>
+                <a:cs typeface="Calibri" panose="020F0502020204030204" pitchFamily="34" charset="0"/>
+              </a:rPr>
+              <a:t>The initial setup had 3 agents, one to do the heavy lifting</a:t>
+            </a:r>
+            <a:r>
+              <a:rPr lang="en-GB" sz="1600" dirty="0">
+                <a:latin typeface="Calibri" panose="020F0502020204030204" pitchFamily="34" charset="0"/>
+                <a:ea typeface="Calibri" panose="020F0502020204030204" pitchFamily="34" charset="0"/>
+                <a:cs typeface="Calibri" panose="020F0502020204030204" pitchFamily="34" charset="0"/>
+              </a:rPr>
+              <a:t>. </a:t>
+            </a:r>
+          </a:p>
+          <a:p>
+            <a:pPr marL="265113" lvl="1"/>
+            <a:r>
+              <a:rPr lang="en-GB" sz="1600" dirty="0">
+                <a:latin typeface="Calibri" panose="020F0502020204030204" pitchFamily="34" charset="0"/>
+                <a:ea typeface="Calibri" panose="020F0502020204030204" pitchFamily="34" charset="0"/>
+                <a:cs typeface="Calibri" panose="020F0502020204030204" pitchFamily="34" charset="0"/>
+              </a:rPr>
+              <a:t>I added a fourth agent (Auditor) to check and validate the answer in order to have better results.</a:t>
+            </a:r>
+          </a:p>
+          <a:p>
+            <a:pPr marL="265113" lvl="1"/>
+            <a:r>
+              <a:rPr lang="en-GB" sz="1600" dirty="0">
+                <a:latin typeface="Calibri" panose="020F0502020204030204" pitchFamily="34" charset="0"/>
+                <a:ea typeface="Calibri" panose="020F0502020204030204" pitchFamily="34" charset="0"/>
+                <a:cs typeface="Calibri" panose="020F0502020204030204" pitchFamily="34" charset="0"/>
+              </a:rPr>
+              <a:t>In most cases the Auditor just </a:t>
+            </a:r>
+            <a:r>
+              <a:rPr lang="en-US" sz="1600" dirty="0">
+                <a:latin typeface="Calibri" panose="020F0502020204030204" pitchFamily="34" charset="0"/>
+                <a:ea typeface="Calibri" panose="020F0502020204030204" pitchFamily="34" charset="0"/>
+                <a:cs typeface="Calibri" panose="020F0502020204030204" pitchFamily="34" charset="0"/>
+              </a:rPr>
+              <a:t>reproduced the Detective answer. </a:t>
+            </a:r>
+          </a:p>
+          <a:p>
+            <a:pPr marL="265113" lvl="1"/>
+            <a:r>
+              <a:rPr lang="en-US" sz="1600" dirty="0">
+                <a:latin typeface="Calibri" panose="020F0502020204030204" pitchFamily="34" charset="0"/>
+                <a:ea typeface="Calibri" panose="020F0502020204030204" pitchFamily="34" charset="0"/>
+                <a:cs typeface="Calibri" panose="020F0502020204030204" pitchFamily="34" charset="0"/>
+              </a:rPr>
+              <a:t>We also had updates to the final answer, some of them were correct.</a:t>
+            </a:r>
+          </a:p>
+          <a:p>
+            <a:endParaRPr lang="en-GB" sz="1600" dirty="0">
+              <a:effectLst/>
+              <a:latin typeface="Calibri" panose="020F0502020204030204" pitchFamily="34" charset="0"/>
+              <a:ea typeface="Calibri" panose="020F0502020204030204" pitchFamily="34" charset="0"/>
+              <a:cs typeface="Calibri" panose="020F0502020204030204" pitchFamily="34" charset="0"/>
+            </a:endParaRPr>
+          </a:p>
+          <a:p>
+            <a:pPr marL="285750" indent="-285750">
+              <a:buFont typeface="Arial" panose="020B0604020202020204" pitchFamily="34" charset="0"/>
+              <a:buChar char="•"/>
+            </a:pPr>
+            <a:r>
+              <a:rPr lang="en-GB" sz="1600" dirty="0">
+                <a:latin typeface="Calibri" panose="020F0502020204030204" pitchFamily="34" charset="0"/>
+                <a:ea typeface="Calibri" panose="020F0502020204030204" pitchFamily="34" charset="0"/>
+                <a:cs typeface="Calibri" panose="020F0502020204030204" pitchFamily="34" charset="0"/>
+              </a:rPr>
+              <a:t>The Agents had problem to follow </a:t>
+            </a:r>
+            <a:r>
+              <a:rPr lang="en-US" sz="1600" dirty="0">
+                <a:latin typeface="Calibri" panose="020F0502020204030204" pitchFamily="34" charset="0"/>
+                <a:ea typeface="Calibri" panose="020F0502020204030204" pitchFamily="34" charset="0"/>
+                <a:cs typeface="Calibri" panose="020F0502020204030204" pitchFamily="34" charset="0"/>
+              </a:rPr>
+              <a:t>clues that have</a:t>
+            </a:r>
+            <a:r>
+              <a:rPr lang="en-GB" sz="1600" dirty="0">
+                <a:latin typeface="Calibri" panose="020F0502020204030204" pitchFamily="34" charset="0"/>
+                <a:ea typeface="Calibri" panose="020F0502020204030204" pitchFamily="34" charset="0"/>
+                <a:cs typeface="Calibri" panose="020F0502020204030204" pitchFamily="34" charset="0"/>
+              </a:rPr>
+              <a:t> </a:t>
+            </a:r>
+            <a:r>
+              <a:rPr lang="en-US" sz="1600" dirty="0">
+                <a:solidFill>
+                  <a:schemeClr val="tx2"/>
+                </a:solidFill>
+                <a:latin typeface="Calibri" panose="020F0502020204030204" pitchFamily="34" charset="0"/>
+                <a:ea typeface="Calibri" panose="020F0502020204030204" pitchFamily="34" charset="0"/>
+                <a:cs typeface="Calibri" panose="020F0502020204030204" pitchFamily="34" charset="0"/>
+              </a:rPr>
+              <a:t>“if and only if” and “OR” that resulted to poor performance.</a:t>
+            </a:r>
+          </a:p>
+          <a:p>
+            <a:pPr marL="265113" lvl="1"/>
+            <a:r>
+              <a:rPr lang="en-US" sz="1600" dirty="0">
+                <a:solidFill>
+                  <a:schemeClr val="tx2"/>
+                </a:solidFill>
+                <a:effectLst/>
+                <a:latin typeface="Calibri" panose="020F0502020204030204" pitchFamily="34" charset="0"/>
+                <a:ea typeface="Calibri" panose="020F0502020204030204" pitchFamily="34" charset="0"/>
+                <a:cs typeface="Calibri" panose="020F0502020204030204" pitchFamily="34" charset="0"/>
+              </a:rPr>
+              <a:t>I tried to create a tool to create and keep a deduction ledger. </a:t>
+            </a:r>
+          </a:p>
+          <a:p>
+            <a:pPr marL="265113" lvl="1"/>
+            <a:r>
+              <a:rPr lang="en-US" sz="1600" dirty="0">
+                <a:solidFill>
+                  <a:schemeClr val="tx2"/>
+                </a:solidFill>
+                <a:effectLst/>
+                <a:latin typeface="Calibri" panose="020F0502020204030204" pitchFamily="34" charset="0"/>
+                <a:ea typeface="Calibri" panose="020F0502020204030204" pitchFamily="34" charset="0"/>
+                <a:cs typeface="Calibri" panose="020F0502020204030204" pitchFamily="34" charset="0"/>
+              </a:rPr>
+              <a:t>The result was the agent to not print reasoning bu</a:t>
+            </a:r>
+            <a:r>
+              <a:rPr lang="en-US" sz="1600" dirty="0">
+                <a:solidFill>
+                  <a:schemeClr val="tx2"/>
+                </a:solidFill>
+                <a:latin typeface="Calibri" panose="020F0502020204030204" pitchFamily="34" charset="0"/>
+                <a:ea typeface="Calibri" panose="020F0502020204030204" pitchFamily="34" charset="0"/>
+                <a:cs typeface="Calibri" panose="020F0502020204030204" pitchFamily="34" charset="0"/>
+              </a:rPr>
+              <a:t>t just output a result so no manual analysis could be done.</a:t>
+            </a:r>
+          </a:p>
+          <a:p>
+            <a:pPr marL="265113" lvl="1"/>
+            <a:r>
+              <a:rPr lang="en-US" sz="1600" dirty="0">
+                <a:solidFill>
+                  <a:schemeClr val="tx2"/>
+                </a:solidFill>
+                <a:effectLst/>
+                <a:latin typeface="Calibri" panose="020F0502020204030204" pitchFamily="34" charset="0"/>
+                <a:ea typeface="Calibri" panose="020F0502020204030204" pitchFamily="34" charset="0"/>
+                <a:cs typeface="Calibri" panose="020F0502020204030204" pitchFamily="34" charset="0"/>
+              </a:rPr>
+              <a:t>Based on the result it didn’t work as expected.</a:t>
+            </a:r>
+            <a:endParaRPr lang="en-GB" sz="1600" dirty="0">
+              <a:effectLst/>
+              <a:latin typeface="Calibri" panose="020F0502020204030204" pitchFamily="34" charset="0"/>
+              <a:ea typeface="Calibri" panose="020F0502020204030204" pitchFamily="34" charset="0"/>
+              <a:cs typeface="Calibri" panose="020F0502020204030204" pitchFamily="34" charset="0"/>
+            </a:endParaRPr>
           </a:p>
         </p:txBody>
       </p:sp>
